--- a/docs/Tether-Review2-Presentation.pptx
+++ b/docs/Tether-Review2-Presentation.pptx
@@ -181,7 +181,7 @@
             <a:pPr>
               <a:defRPr sz="1200" b="0" i="0" u="none" strike="noStrike">
                 <a:solidFill>
-                  <a:srgbClr val="4A5260"/>
+                  <a:srgbClr val="A9ACB2"/>
                 </a:solidFill>
                 <a:latin typeface="+mn-lt"/>
               </a:defRPr>
@@ -189,7 +189,7 @@
             <a:r>
               <a:rPr sz="1200" b="0" i="0" u="none" strike="noStrike">
                 <a:solidFill>
-                  <a:srgbClr val="4A5260"/>
+                  <a:srgbClr val="A9ACB2"/>
                 </a:solidFill>
                 <a:latin typeface="+mn-lt"/>
               </a:rPr>
@@ -224,7 +224,7 @@
           </c:tx>
           <c:spPr>
             <a:solidFill>
-              <a:srgbClr val="15181D"/>
+              <a:srgbClr val="B6B8BC"/>
             </a:solidFill>
             <a:effectLst/>
           </c:spPr>
@@ -238,7 +238,7 @@
                 <a:pPr>
                   <a:defRPr b="0" i="0" strike="noStrike" sz="1100" u="none">
                     <a:solidFill>
-                      <a:srgbClr val="15181D"/>
+                      <a:srgbClr val="E4E4E2"/>
                     </a:solidFill>
                     <a:latin typeface="+mn-lt"/>
                   </a:defRPr>
@@ -348,7 +348,7 @@
               <a:pPr>
                 <a:defRPr b="0" i="0" strike="noStrike" sz="1100" u="none">
                   <a:solidFill>
-                    <a:srgbClr val="15181D"/>
+                    <a:srgbClr val="E4E4E2"/>
                   </a:solidFill>
                   <a:latin typeface="+mn-lt"/>
                 </a:defRPr>
@@ -394,7 +394,7 @@
             <a:pPr>
               <a:defRPr sz="1100" b="0" i="0" u="none" strike="noStrike">
                 <a:solidFill>
-                  <a:srgbClr val="4A5260"/>
+                  <a:srgbClr val="A9ACB2"/>
                 </a:solidFill>
                 <a:latin typeface="+mn-lt"/>
               </a:defRPr>
@@ -422,7 +422,7 @@
         <c:spPr>
           <a:ln w="12700" cap="flat">
             <a:solidFill>
-              <a:srgbClr val="888888"/>
+              <a:srgbClr val="3A3D44"/>
             </a:solidFill>
             <a:prstDash val="solid"/>
             <a:round/>
@@ -435,7 +435,7 @@
             <a:pPr>
               <a:defRPr sz="1200" b="0" i="0" u="none" strike="noStrike">
                 <a:solidFill>
-                  <a:srgbClr val="000000"/>
+                  <a:srgbClr val="A9ACB2"/>
                 </a:solidFill>
                 <a:latin typeface="Arial"/>
               </a:defRPr>
@@ -499,7 +499,7 @@
           </c:tx>
           <c:spPr>
             <a:solidFill>
-              <a:srgbClr val="15181D"/>
+              <a:srgbClr val="B6B8BC"/>
             </a:solidFill>
             <a:effectLst/>
           </c:spPr>
@@ -513,7 +513,7 @@
                 <a:pPr>
                   <a:defRPr b="1" i="0" strike="noStrike" sz="1200" u="none">
                     <a:solidFill>
-                      <a:srgbClr val="FFFFFF"/>
+                      <a:srgbClr val="0F1012"/>
                     </a:solidFill>
                     <a:latin typeface="+mn-lt"/>
                   </a:defRPr>
@@ -571,7 +571,7 @@
           </c:tx>
           <c:spPr>
             <a:solidFill>
-              <a:srgbClr val="9AA1AC"/>
+              <a:srgbClr val="5A5E66"/>
             </a:solidFill>
             <a:effectLst/>
           </c:spPr>
@@ -585,7 +585,7 @@
                 <a:pPr>
                   <a:defRPr b="1" i="0" strike="noStrike" sz="1200" u="none">
                     <a:solidFill>
-                      <a:srgbClr val="FFFFFF"/>
+                      <a:srgbClr val="E4E4E2"/>
                     </a:solidFill>
                     <a:latin typeface="+mn-lt"/>
                   </a:defRPr>
@@ -636,7 +636,7 @@
               <a:pPr>
                 <a:defRPr b="1" i="0" strike="noStrike" sz="1200" u="none">
                   <a:solidFill>
-                    <a:srgbClr val="FFFFFF"/>
+                    <a:srgbClr val="E4E4E2"/>
                   </a:solidFill>
                   <a:latin typeface="+mn-lt"/>
                 </a:defRPr>
@@ -672,7 +672,7 @@
         <c:spPr>
           <a:ln w="12700" cap="flat">
             <a:solidFill>
-              <a:srgbClr val="888888"/>
+              <a:srgbClr val="3A3D44"/>
             </a:solidFill>
             <a:prstDash val="solid"/>
             <a:round/>
@@ -685,7 +685,7 @@
             <a:pPr>
               <a:defRPr sz="1200" b="0" i="0" u="none" strike="noStrike">
                 <a:solidFill>
-                  <a:srgbClr val="000000"/>
+                  <a:srgbClr val="A9ACB2"/>
                 </a:solidFill>
                 <a:latin typeface="Arial"/>
               </a:defRPr>
@@ -713,7 +713,7 @@
         <c:spPr>
           <a:ln w="12700" cap="flat">
             <a:solidFill>
-              <a:srgbClr val="888888"/>
+              <a:srgbClr val="3A3D44"/>
             </a:solidFill>
             <a:prstDash val="solid"/>
             <a:round/>
@@ -726,7 +726,7 @@
             <a:pPr>
               <a:defRPr sz="1200" b="0" i="0" u="none" strike="noStrike">
                 <a:solidFill>
-                  <a:srgbClr val="000000"/>
+                  <a:srgbClr val="A9ACB2"/>
                 </a:solidFill>
                 <a:latin typeface="Arial"/>
               </a:defRPr>
@@ -756,7 +756,7 @@
           <a:pPr>
             <a:defRPr sz="1100">
               <a:solidFill>
-                <a:srgbClr val="4A5260"/>
+                <a:srgbClr val="A9ACB2"/>
               </a:solidFill>
               <a:latin typeface="+mn-lt"/>
               <a:cs typeface="+mn-lt"/>
@@ -1705,7 +1705,7 @@
           <a:p>
             <a:r>
               <a:rPr lang="en-US" dirty="0"/>
-              <a:t>The playground now shows all six phases live. Under JavaScript, each underlined segment is one source-map entry: hovering it highlights the Tether code it came from. The Run tab executes the generated program.</a:t>
+              <a:t>The playground now shows all six phases live. Under JavaScript, each underlined segment is one source-map entry: hovering it highlights the Tether code it came from. The Run tab executes the generated program. In the screenshot I am hovering var$ in the JavaScript: the Tether name var lights up, and the status bar shows both positions, 1-based in Tether and 0-based in the map.</a:t>
             </a:r>
             <a:endParaRPr lang="en-US" dirty="0"/>
           </a:p>
@@ -2751,7 +2751,7 @@
     <p:bg>
       <p:bgPr>
         <a:solidFill>
-          <a:schemeClr val="tx1"/>
+          <a:srgbClr val="0B0C0E"/>
         </a:solidFill>
       </p:bgPr>
     </p:bg>
@@ -2837,7 +2837,7 @@
               <a:buNone/>
               <a:defRPr lang="en-US" sz="6000" b="1" dirty="0">
                 <a:solidFill>
-                  <a:schemeClr val="bg1"/>
+                  <a:schemeClr val="tx1"/>
                 </a:solidFill>
               </a:defRPr>
             </a:lvl1pPr>
@@ -2876,7 +2876,7 @@
               <a:buNone/>
               <a:defRPr lang="en-US" sz="2000" dirty="0">
                 <a:solidFill>
-                  <a:srgbClr val="C9CED6"/>
+                  <a:srgbClr val="B6B8BC"/>
                 </a:solidFill>
               </a:defRPr>
             </a:lvl1pPr>
@@ -3032,7 +3032,7 @@
             <a:lvl1pPr>
               <a:defRPr sz="1000">
                 <a:solidFill>
-                  <a:srgbClr val="9AA1AC"/>
+                  <a:srgbClr val="868A91"/>
                 </a:solidFill>
                 <a:latin typeface="Consolas"/>
                 <a:ea typeface="Consolas"/>
@@ -3105,7 +3105,7 @@
             <a:lvl1pPr>
               <a:defRPr sz="1000">
                 <a:solidFill>
-                  <a:srgbClr val="9AA1AC"/>
+                  <a:srgbClr val="868A91"/>
                 </a:solidFill>
                 <a:latin typeface="Consolas"/>
                 <a:ea typeface="Consolas"/>
@@ -3472,7 +3472,7 @@
             <a:r>
               <a:rPr lang="en-US" sz="6000" b="1" dirty="0">
                 <a:solidFill>
-                  <a:schemeClr val="bg1"/>
+                  <a:schemeClr val="tx1"/>
                 </a:solidFill>
               </a:rPr>
               <a:t>Tether</a:t>
@@ -3510,7 +3510,7 @@
             <a:r>
               <a:rPr lang="en-US" sz="2000" dirty="0">
                 <a:solidFill>
-                  <a:srgbClr val="C9CED6"/>
+                  <a:srgbClr val="B6B8BC"/>
                 </a:solidFill>
               </a:rPr>
               <a:t>Review 2: 75% implementation (milestones 3–6)</a:t>
@@ -3566,7 +3566,7 @@
             <a:r>
               <a:rPr lang="en-US" sz="2200" dirty="0">
                 <a:solidFill>
-                  <a:srgbClr val="FFFFFF"/>
+                  <a:srgbClr val="E4E4E2"/>
                 </a:solidFill>
                 <a:latin typeface="Consolas" pitchFamily="34" charset="0"/>
                 <a:ea typeface="Consolas" pitchFamily="34" charset="-122"/>
@@ -3580,7 +3580,7 @@
             <a:r>
               <a:rPr lang="en-US" sz="2200" dirty="0">
                 <a:solidFill>
-                  <a:srgbClr val="15181D"/>
+                  <a:srgbClr val="1A1305"/>
                 </a:solidFill>
                 <a:latin typeface="Consolas" pitchFamily="34" charset="0"/>
                 <a:ea typeface="Consolas" pitchFamily="34" charset="-122"/>
@@ -3594,7 +3594,7 @@
             <a:r>
               <a:rPr lang="en-US" sz="2200" dirty="0">
                 <a:solidFill>
-                  <a:srgbClr val="FFFFFF"/>
+                  <a:srgbClr val="E4E4E2"/>
                 </a:solidFill>
                 <a:latin typeface="Consolas" pitchFamily="34" charset="0"/>
                 <a:ea typeface="Consolas" pitchFamily="34" charset="-122"/>
@@ -3623,7 +3623,7 @@
           <a:noFill/>
           <a:ln w="12700">
             <a:solidFill>
-              <a:srgbClr val="F5B82E"/>
+              <a:srgbClr val="F0B54A"/>
             </a:solidFill>
             <a:prstDash val="solid"/>
           </a:ln>
@@ -3695,7 +3695,7 @@
             <a:r>
               <a:rPr lang="en-US" sz="1300" i="1" dirty="0">
                 <a:solidFill>
-                  <a:srgbClr val="8B93A1"/>
+                  <a:srgbClr val="8A8E96"/>
                 </a:solidFill>
               </a:rPr>
               <a:t>the generated JavaScript now knows where every token came from</a:t>
@@ -3731,7 +3731,7 @@
             <a:r>
               <a:rPr lang="en-US" sz="1300" b="1" dirty="0">
                 <a:solidFill>
-                  <a:srgbClr val="FFFFFF"/>
+                  <a:srgbClr val="E4E4E2"/>
                 </a:solidFill>
               </a:rPr>
               <a:t>Antra</a:t>
@@ -3745,7 +3745,7 @@
             <a:r>
               <a:rPr lang="en-US" sz="1300" dirty="0">
                 <a:solidFill>
-                  <a:srgbClr val="B4BAC4"/>
+                  <a:srgbClr val="9A9EA6"/>
                 </a:solidFill>
               </a:rPr>
               <a:t>24BDS0066  ·  Compiler Design</a:t>
@@ -3873,9 +3873,13 @@
             <a:avLst/>
           </a:prstGeom>
           <a:solidFill>
-            <a:schemeClr val="tx1"/>
+            <a:srgbClr val="1E2025"/>
           </a:solidFill>
-          <a:ln/>
+          <a:ln w="9525">
+            <a:solidFill>
+              <a:srgbClr val="2E3138"/>
+            </a:solidFill>
+          </a:ln>
         </p:spPr>
       </p:sp>
       <p:sp>
@@ -3908,7 +3912,7 @@
             <a:r>
               <a:rPr lang="en-US" sz="1100" dirty="0">
                 <a:solidFill>
-                  <a:srgbClr val="E4E7EC"/>
+                  <a:srgbClr val="E4E4E2"/>
                 </a:solidFill>
                 <a:latin typeface="Consolas" pitchFamily="34" charset="0"/>
                 <a:ea typeface="Consolas" pitchFamily="34" charset="-122"/>
@@ -3928,7 +3932,7 @@
             <a:r>
               <a:rPr lang="en-US" sz="1100" dirty="0">
                 <a:solidFill>
-                  <a:srgbClr val="E4E7EC"/>
+                  <a:srgbClr val="E4E4E2"/>
                 </a:solidFill>
                 <a:latin typeface="Consolas" pitchFamily="34" charset="0"/>
                 <a:ea typeface="Consolas" pitchFamily="34" charset="-122"/>
@@ -3948,7 +3952,7 @@
             <a:r>
               <a:rPr lang="en-US" sz="1100" dirty="0">
                 <a:solidFill>
-                  <a:srgbClr val="E4E7EC"/>
+                  <a:srgbClr val="E4E4E2"/>
                 </a:solidFill>
                 <a:latin typeface="Consolas" pitchFamily="34" charset="0"/>
                 <a:ea typeface="Consolas" pitchFamily="34" charset="-122"/>
@@ -3968,7 +3972,7 @@
             <a:r>
               <a:rPr lang="en-US" sz="1100" dirty="0">
                 <a:solidFill>
-                  <a:srgbClr val="E4E7EC"/>
+                  <a:srgbClr val="E4E4E2"/>
                 </a:solidFill>
                 <a:latin typeface="Consolas" pitchFamily="34" charset="0"/>
                 <a:ea typeface="Consolas" pitchFamily="34" charset="-122"/>
@@ -3988,7 +3992,7 @@
             <a:r>
               <a:rPr lang="en-US" sz="1100" dirty="0">
                 <a:solidFill>
-                  <a:srgbClr val="E4E7EC"/>
+                  <a:srgbClr val="E4E4E2"/>
                 </a:solidFill>
                 <a:latin typeface="Consolas" pitchFamily="34" charset="0"/>
                 <a:ea typeface="Consolas" pitchFamily="34" charset="-122"/>
@@ -4008,7 +4012,7 @@
             <a:r>
               <a:rPr lang="en-US" sz="1100" dirty="0">
                 <a:solidFill>
-                  <a:srgbClr val="E4E7EC"/>
+                  <a:srgbClr val="E4E4E2"/>
                 </a:solidFill>
                 <a:latin typeface="Consolas" pitchFamily="34" charset="0"/>
                 <a:ea typeface="Consolas" pitchFamily="34" charset="-122"/>
@@ -4028,7 +4032,7 @@
             <a:r>
               <a:rPr lang="en-US" sz="1100" dirty="0">
                 <a:solidFill>
-                  <a:srgbClr val="E4E7EC"/>
+                  <a:srgbClr val="E4E4E2"/>
                 </a:solidFill>
                 <a:latin typeface="Consolas" pitchFamily="34" charset="0"/>
                 <a:ea typeface="Consolas" pitchFamily="34" charset="-122"/>
@@ -4045,7 +4049,7 @@
             <a:r>
               <a:rPr lang="en-US" sz="1100" dirty="0">
                 <a:solidFill>
-                  <a:srgbClr val="F5B82E"/>
+                  <a:srgbClr val="F0B54A"/>
                 </a:solidFill>
                 <a:latin typeface="Consolas" pitchFamily="34" charset="0"/>
                 <a:ea typeface="Consolas" pitchFamily="34" charset="-122"/>
@@ -4062,7 +4066,7 @@
             <a:r>
               <a:rPr lang="en-US" sz="1100" dirty="0">
                 <a:solidFill>
-                  <a:srgbClr val="E4E7EC"/>
+                  <a:srgbClr val="E4E4E2"/>
                 </a:solidFill>
                 <a:latin typeface="Consolas" pitchFamily="34" charset="0"/>
                 <a:ea typeface="Consolas" pitchFamily="34" charset="-122"/>
@@ -4082,7 +4086,7 @@
             <a:r>
               <a:rPr lang="en-US" sz="1100" dirty="0">
                 <a:solidFill>
-                  <a:srgbClr val="E4E7EC"/>
+                  <a:srgbClr val="E4E4E2"/>
                 </a:solidFill>
                 <a:latin typeface="Consolas" pitchFamily="34" charset="0"/>
                 <a:ea typeface="Consolas" pitchFamily="34" charset="-122"/>
@@ -4363,7 +4367,7 @@
           <a:noFill/>
           <a:ln w="9525">
             <a:solidFill>
-              <a:srgbClr val="DADDE2"/>
+              <a:srgbClr val="2A2D33"/>
             </a:solidFill>
             <a:prstDash val="solid"/>
           </a:ln>
@@ -4449,7 +4453,7 @@
             <a:lvl1pPr>
               <a:defRPr sz="1000">
                 <a:solidFill>
-                  <a:srgbClr val="9AA1AC"/>
+                  <a:srgbClr val="868A91"/>
                 </a:solidFill>
                 <a:latin typeface="Consolas"/>
                 <a:ea typeface="Consolas"/>
@@ -4878,7 +4882,7 @@
             <a:lvl1pPr>
               <a:defRPr sz="1000">
                 <a:solidFill>
-                  <a:srgbClr val="9AA1AC"/>
+                  <a:srgbClr val="868A91"/>
                 </a:solidFill>
                 <a:latin typeface="Consolas"/>
                 <a:ea typeface="Consolas"/>
@@ -5051,9 +5055,13 @@
             <a:avLst/>
           </a:prstGeom>
           <a:solidFill>
-            <a:schemeClr val="tx1"/>
+            <a:srgbClr val="1E2025"/>
           </a:solidFill>
-          <a:ln/>
+          <a:ln w="9525">
+            <a:solidFill>
+              <a:srgbClr val="2E3138"/>
+            </a:solidFill>
+          </a:ln>
         </p:spPr>
       </p:sp>
       <p:sp>
@@ -5086,7 +5094,7 @@
             <a:r>
               <a:rPr lang="en-US" sz="1050" dirty="0">
                 <a:solidFill>
-                  <a:srgbClr val="8B93A1"/>
+                  <a:srgbClr val="8A8E96"/>
                 </a:solidFill>
                 <a:latin typeface="Consolas" pitchFamily="34" charset="0"/>
                 <a:ea typeface="Consolas" pitchFamily="34" charset="-122"/>
@@ -5106,7 +5114,7 @@
             <a:r>
               <a:rPr lang="en-US" sz="1050" dirty="0">
                 <a:solidFill>
-                  <a:srgbClr val="FF8A80"/>
+                  <a:srgbClr val="FF6F6B"/>
                 </a:solidFill>
                 <a:latin typeface="Consolas" pitchFamily="34" charset="0"/>
                 <a:ea typeface="Consolas" pitchFamily="34" charset="-122"/>
@@ -5126,7 +5134,7 @@
             <a:r>
               <a:rPr lang="en-US" sz="1050" dirty="0">
                 <a:solidFill>
-                  <a:srgbClr val="E4E7EC"/>
+                  <a:srgbClr val="E4E4E2"/>
                 </a:solidFill>
                 <a:latin typeface="Consolas" pitchFamily="34" charset="0"/>
                 <a:ea typeface="Consolas" pitchFamily="34" charset="-122"/>
@@ -5143,7 +5151,7 @@
             <a:r>
               <a:rPr lang="en-US" sz="1050" dirty="0">
                 <a:solidFill>
-                  <a:srgbClr val="F5B82E"/>
+                  <a:srgbClr val="F0B54A"/>
                 </a:solidFill>
                 <a:latin typeface="Consolas" pitchFamily="34" charset="0"/>
                 <a:ea typeface="Consolas" pitchFamily="34" charset="-122"/>
@@ -5160,7 +5168,7 @@
             <a:r>
               <a:rPr lang="en-US" sz="1050" dirty="0">
                 <a:solidFill>
-                  <a:srgbClr val="E4E7EC"/>
+                  <a:srgbClr val="E4E4E2"/>
                 </a:solidFill>
                 <a:latin typeface="Consolas" pitchFamily="34" charset="0"/>
                 <a:ea typeface="Consolas" pitchFamily="34" charset="-122"/>
@@ -5180,7 +5188,7 @@
             <a:r>
               <a:rPr lang="en-US" sz="1050" dirty="0">
                 <a:solidFill>
-                  <a:srgbClr val="E4E7EC"/>
+                  <a:srgbClr val="E4E4E2"/>
                 </a:solidFill>
                 <a:latin typeface="Consolas" pitchFamily="34" charset="0"/>
                 <a:ea typeface="Consolas" pitchFamily="34" charset="-122"/>
@@ -5243,9 +5251,13 @@
             <a:avLst/>
           </a:prstGeom>
           <a:solidFill>
-            <a:schemeClr val="tx1"/>
+            <a:srgbClr val="1E2025"/>
           </a:solidFill>
-          <a:ln/>
+          <a:ln w="9525">
+            <a:solidFill>
+              <a:srgbClr val="2E3138"/>
+            </a:solidFill>
+          </a:ln>
         </p:spPr>
       </p:sp>
       <p:sp>
@@ -5278,7 +5290,7 @@
             <a:r>
               <a:rPr lang="en-US" sz="1050" dirty="0">
                 <a:solidFill>
-                  <a:srgbClr val="8B93A1"/>
+                  <a:srgbClr val="8A8E96"/>
                 </a:solidFill>
                 <a:latin typeface="Consolas" pitchFamily="34" charset="0"/>
                 <a:ea typeface="Consolas" pitchFamily="34" charset="-122"/>
@@ -5298,7 +5310,7 @@
             <a:r>
               <a:rPr lang="en-US" sz="1050" dirty="0">
                 <a:solidFill>
-                  <a:srgbClr val="E4E7EC"/>
+                  <a:srgbClr val="E4E4E2"/>
                 </a:solidFill>
                 <a:latin typeface="Consolas" pitchFamily="34" charset="0"/>
                 <a:ea typeface="Consolas" pitchFamily="34" charset="-122"/>
@@ -5318,7 +5330,7 @@
             <a:r>
               <a:rPr lang="en-US" sz="1050" dirty="0">
                 <a:solidFill>
-                  <a:srgbClr val="FF8A80"/>
+                  <a:srgbClr val="FF6F6B"/>
                 </a:solidFill>
                 <a:latin typeface="Consolas" pitchFamily="34" charset="0"/>
                 <a:ea typeface="Consolas" pitchFamily="34" charset="-122"/>
@@ -5338,7 +5350,7 @@
             <a:r>
               <a:rPr lang="en-US" sz="1050" dirty="0">
                 <a:solidFill>
-                  <a:srgbClr val="E4E7EC"/>
+                  <a:srgbClr val="E4E4E2"/>
                 </a:solidFill>
                 <a:latin typeface="Consolas" pitchFamily="34" charset="0"/>
                 <a:ea typeface="Consolas" pitchFamily="34" charset="-122"/>
@@ -5355,7 +5367,7 @@
             <a:r>
               <a:rPr lang="en-US" sz="1050" dirty="0">
                 <a:solidFill>
-                  <a:srgbClr val="F5B82E"/>
+                  <a:srgbClr val="F0B54A"/>
                 </a:solidFill>
                 <a:latin typeface="Consolas" pitchFamily="34" charset="0"/>
                 <a:ea typeface="Consolas" pitchFamily="34" charset="-122"/>
@@ -5372,7 +5384,7 @@
             <a:r>
               <a:rPr lang="en-US" sz="1050" dirty="0">
                 <a:solidFill>
-                  <a:srgbClr val="E4E7EC"/>
+                  <a:srgbClr val="E4E4E2"/>
                 </a:solidFill>
                 <a:latin typeface="Consolas" pitchFamily="34" charset="0"/>
                 <a:ea typeface="Consolas" pitchFamily="34" charset="-122"/>
@@ -5486,7 +5498,7 @@
             <a:lvl1pPr>
               <a:defRPr sz="1000">
                 <a:solidFill>
-                  <a:srgbClr val="9AA1AC"/>
+                  <a:srgbClr val="868A91"/>
                 </a:solidFill>
                 <a:latin typeface="Consolas"/>
                 <a:ea typeface="Consolas"/>
@@ -5870,7 +5882,7 @@
             <a:lvl1pPr>
               <a:defRPr sz="1000">
                 <a:solidFill>
-                  <a:srgbClr val="9AA1AC"/>
+                  <a:srgbClr val="868A91"/>
                 </a:solidFill>
                 <a:latin typeface="Consolas"/>
                 <a:ea typeface="Consolas"/>
@@ -6047,7 +6059,7 @@
                       <a:r>
                         <a:rPr lang="en-US" sz="1100" b="1" dirty="0">
                           <a:solidFill>
-                            <a:srgbClr val="4A5260"/>
+                            <a:srgbClr val="A9ACB2"/>
                           </a:solidFill>
                         </a:rPr>
                         <a:t>Area</a:t>
@@ -6067,7 +6079,7 @@
                     </a:lnT>
                     <a:lnB w="12700" cap="flat" cmpd="sng" algn="ctr">
                       <a:solidFill>
-                        <a:srgbClr val="15181D"/>
+                        <a:srgbClr val="4A4E55"/>
                       </a:solidFill>
                       <a:prstDash val="solid"/>
                       <a:round/>
@@ -6087,7 +6099,7 @@
                       <a:r>
                         <a:rPr lang="en-US" sz="1100" b="1" dirty="0">
                           <a:solidFill>
-                            <a:srgbClr val="4A5260"/>
+                            <a:srgbClr val="A9ACB2"/>
                           </a:solidFill>
                         </a:rPr>
                         <a:t>Requirements</a:t>
@@ -6107,7 +6119,7 @@
                     </a:lnT>
                     <a:lnB w="12700" cap="flat" cmpd="sng" algn="ctr">
                       <a:solidFill>
-                        <a:srgbClr val="15181D"/>
+                        <a:srgbClr val="4A4E55"/>
                       </a:solidFill>
                       <a:prstDash val="solid"/>
                       <a:round/>
@@ -6127,7 +6139,7 @@
                       <a:r>
                         <a:rPr lang="en-US" sz="1100" b="1" dirty="0">
                           <a:solidFill>
-                            <a:srgbClr val="4A5260"/>
+                            <a:srgbClr val="A9ACB2"/>
                           </a:solidFill>
                         </a:rPr>
                         <a:t>Status</a:t>
@@ -6147,7 +6159,7 @@
                     </a:lnT>
                     <a:lnB w="12700" cap="flat" cmpd="sng" algn="ctr">
                       <a:solidFill>
-                        <a:srgbClr val="15181D"/>
+                        <a:srgbClr val="4A4E55"/>
                       </a:solidFill>
                       <a:prstDash val="solid"/>
                       <a:round/>
@@ -6169,7 +6181,7 @@
                       <a:r>
                         <a:rPr lang="en-US" sz="1250" dirty="0">
                           <a:solidFill>
-                            <a:srgbClr val="15181D"/>
+                            <a:srgbClr val="E4E4E2"/>
                           </a:solidFill>
                         </a:rPr>
                         <a:t>Lexing, parsing, diagnostics</a:t>
@@ -6189,7 +6201,7 @@
                     </a:lnT>
                     <a:lnB w="9525" cap="flat" cmpd="sng" algn="ctr">
                       <a:solidFill>
-                        <a:srgbClr val="DADDE2"/>
+                        <a:srgbClr val="2A2D33"/>
                       </a:solidFill>
                       <a:prstDash val="solid"/>
                       <a:round/>
@@ -6209,7 +6221,7 @@
                       <a:r>
                         <a:rPr lang="en-US" sz="1150" dirty="0">
                           <a:solidFill>
-                            <a:srgbClr val="15181D"/>
+                            <a:srgbClr val="E4E4E2"/>
                           </a:solidFill>
                           <a:latin typeface="Consolas" pitchFamily="34" charset="0"/>
                           <a:ea typeface="Consolas" pitchFamily="34" charset="-122"/>
@@ -6236,7 +6248,7 @@
                     </a:lnT>
                     <a:lnB w="9525" cap="flat" cmpd="sng" algn="ctr">
                       <a:solidFill>
-                        <a:srgbClr val="DADDE2"/>
+                        <a:srgbClr val="2A2D33"/>
                       </a:solidFill>
                       <a:prstDash val="solid"/>
                       <a:round/>
@@ -6256,7 +6268,7 @@
                       <a:r>
                         <a:rPr lang="en-US" sz="1250" b="1" dirty="0">
                           <a:solidFill>
-                            <a:srgbClr val="1F7A4D"/>
+                            <a:srgbClr val="5CC98A"/>
                           </a:solidFill>
                         </a:rPr>
                         <a:t>done</a:t>
@@ -6276,7 +6288,7 @@
                     </a:lnT>
                     <a:lnB w="9525" cap="flat" cmpd="sng" algn="ctr">
                       <a:solidFill>
-                        <a:srgbClr val="DADDE2"/>
+                        <a:srgbClr val="2A2D33"/>
                       </a:solidFill>
                       <a:prstDash val="solid"/>
                       <a:round/>
@@ -6298,7 +6310,7 @@
                       <a:r>
                         <a:rPr lang="en-US" sz="1250" dirty="0">
                           <a:solidFill>
-                            <a:srgbClr val="15181D"/>
+                            <a:srgbClr val="E4E4E2"/>
                           </a:solidFill>
                         </a:rPr>
                         <a:t>Scopes and types; no output on error</a:t>
@@ -6318,7 +6330,7 @@
                     </a:lnT>
                     <a:lnB w="9525" cap="flat" cmpd="sng" algn="ctr">
                       <a:solidFill>
-                        <a:srgbClr val="DADDE2"/>
+                        <a:srgbClr val="2A2D33"/>
                       </a:solidFill>
                       <a:prstDash val="solid"/>
                       <a:round/>
@@ -6338,7 +6350,7 @@
                       <a:r>
                         <a:rPr lang="en-US" sz="1150" dirty="0">
                           <a:solidFill>
-                            <a:srgbClr val="15181D"/>
+                            <a:srgbClr val="E4E4E2"/>
                           </a:solidFill>
                           <a:latin typeface="Consolas" pitchFamily="34" charset="0"/>
                           <a:ea typeface="Consolas" pitchFamily="34" charset="-122"/>
@@ -6365,7 +6377,7 @@
                     </a:lnT>
                     <a:lnB w="9525" cap="flat" cmpd="sng" algn="ctr">
                       <a:solidFill>
-                        <a:srgbClr val="DADDE2"/>
+                        <a:srgbClr val="2A2D33"/>
                       </a:solidFill>
                       <a:prstDash val="solid"/>
                       <a:round/>
@@ -6385,7 +6397,7 @@
                       <a:r>
                         <a:rPr lang="en-US" sz="1250" b="1" dirty="0">
                           <a:solidFill>
-                            <a:srgbClr val="1F7A4D"/>
+                            <a:srgbClr val="5CC98A"/>
                           </a:solidFill>
                         </a:rPr>
                         <a:t>done</a:t>
@@ -6405,7 +6417,7 @@
                     </a:lnT>
                     <a:lnB w="9525" cap="flat" cmpd="sng" algn="ctr">
                       <a:solidFill>
-                        <a:srgbClr val="DADDE2"/>
+                        <a:srgbClr val="2A2D33"/>
                       </a:solidFill>
                       <a:prstDash val="solid"/>
                       <a:round/>
@@ -6427,7 +6439,7 @@
                       <a:r>
                         <a:rPr lang="en-US" sz="1250" dirty="0">
                           <a:solidFill>
-                            <a:srgbClr val="15181D"/>
+                            <a:srgbClr val="E4E4E2"/>
                           </a:solidFill>
                         </a:rPr>
                         <a:t>Lowering and JavaScript emission</a:t>
@@ -6447,7 +6459,7 @@
                     </a:lnT>
                     <a:lnB w="9525" cap="flat" cmpd="sng" algn="ctr">
                       <a:solidFill>
-                        <a:srgbClr val="DADDE2"/>
+                        <a:srgbClr val="2A2D33"/>
                       </a:solidFill>
                       <a:prstDash val="solid"/>
                       <a:round/>
@@ -6467,7 +6479,7 @@
                       <a:r>
                         <a:rPr lang="en-US" sz="1150" dirty="0">
                           <a:solidFill>
-                            <a:srgbClr val="15181D"/>
+                            <a:srgbClr val="E4E4E2"/>
                           </a:solidFill>
                           <a:latin typeface="Consolas" pitchFamily="34" charset="0"/>
                           <a:ea typeface="Consolas" pitchFamily="34" charset="-122"/>
@@ -6494,7 +6506,7 @@
                     </a:lnT>
                     <a:lnB w="9525" cap="flat" cmpd="sng" algn="ctr">
                       <a:solidFill>
-                        <a:srgbClr val="DADDE2"/>
+                        <a:srgbClr val="2A2D33"/>
                       </a:solidFill>
                       <a:prstDash val="solid"/>
                       <a:round/>
@@ -6514,7 +6526,7 @@
                       <a:r>
                         <a:rPr lang="en-US" sz="1250" b="1" dirty="0">
                           <a:solidFill>
-                            <a:srgbClr val="1F7A4D"/>
+                            <a:srgbClr val="5CC98A"/>
                           </a:solidFill>
                         </a:rPr>
                         <a:t>done</a:t>
@@ -6534,7 +6546,7 @@
                     </a:lnT>
                     <a:lnB w="9525" cap="flat" cmpd="sng" algn="ctr">
                       <a:solidFill>
-                        <a:srgbClr val="DADDE2"/>
+                        <a:srgbClr val="2A2D33"/>
                       </a:solidFill>
                       <a:prstDash val="solid"/>
                       <a:round/>
@@ -6556,7 +6568,7 @@
                       <a:r>
                         <a:rPr lang="en-US" sz="1250" dirty="0">
                           <a:solidFill>
-                            <a:srgbClr val="15181D"/>
+                            <a:srgbClr val="E4E4E2"/>
                           </a:solidFill>
                         </a:rPr>
                         <a:t>Source map</a:t>
@@ -6576,7 +6588,7 @@
                     </a:lnT>
                     <a:lnB w="9525" cap="flat" cmpd="sng" algn="ctr">
                       <a:solidFill>
-                        <a:srgbClr val="DADDE2"/>
+                        <a:srgbClr val="2A2D33"/>
                       </a:solidFill>
                       <a:prstDash val="solid"/>
                       <a:round/>
@@ -6596,7 +6608,7 @@
                       <a:r>
                         <a:rPr lang="en-US" sz="1150" dirty="0">
                           <a:solidFill>
-                            <a:srgbClr val="15181D"/>
+                            <a:srgbClr val="E4E4E2"/>
                           </a:solidFill>
                           <a:latin typeface="Consolas" pitchFamily="34" charset="0"/>
                           <a:ea typeface="Consolas" pitchFamily="34" charset="-122"/>
@@ -6623,7 +6635,7 @@
                     </a:lnT>
                     <a:lnB w="9525" cap="flat" cmpd="sng" algn="ctr">
                       <a:solidFill>
-                        <a:srgbClr val="DADDE2"/>
+                        <a:srgbClr val="2A2D33"/>
                       </a:solidFill>
                       <a:prstDash val="solid"/>
                       <a:round/>
@@ -6643,7 +6655,7 @@
                       <a:r>
                         <a:rPr lang="en-US" sz="1250" b="1" dirty="0">
                           <a:solidFill>
-                            <a:srgbClr val="1F7A4D"/>
+                            <a:srgbClr val="5CC98A"/>
                           </a:solidFill>
                         </a:rPr>
                         <a:t>done</a:t>
@@ -6663,7 +6675,7 @@
                     </a:lnT>
                     <a:lnB w="9525" cap="flat" cmpd="sng" algn="ctr">
                       <a:solidFill>
-                        <a:srgbClr val="DADDE2"/>
+                        <a:srgbClr val="2A2D33"/>
                       </a:solidFill>
                       <a:prstDash val="solid"/>
                       <a:round/>
@@ -6685,7 +6697,7 @@
                       <a:r>
                         <a:rPr lang="en-US" sz="1250" dirty="0">
                           <a:solidFill>
-                            <a:srgbClr val="15181D"/>
+                            <a:srgbClr val="E4E4E2"/>
                           </a:solidFill>
                         </a:rPr>
                         <a:t>Command line</a:t>
@@ -6705,7 +6717,7 @@
                     </a:lnT>
                     <a:lnB w="9525" cap="flat" cmpd="sng" algn="ctr">
                       <a:solidFill>
-                        <a:srgbClr val="DADDE2"/>
+                        <a:srgbClr val="2A2D33"/>
                       </a:solidFill>
                       <a:prstDash val="solid"/>
                       <a:round/>
@@ -6725,7 +6737,7 @@
                       <a:r>
                         <a:rPr lang="en-US" sz="1150" dirty="0">
                           <a:solidFill>
-                            <a:srgbClr val="15181D"/>
+                            <a:srgbClr val="E4E4E2"/>
                           </a:solidFill>
                           <a:latin typeface="Consolas" pitchFamily="34" charset="0"/>
                           <a:ea typeface="Consolas" pitchFamily="34" charset="-122"/>
@@ -6752,7 +6764,7 @@
                     </a:lnT>
                     <a:lnB w="9525" cap="flat" cmpd="sng" algn="ctr">
                       <a:solidFill>
-                        <a:srgbClr val="DADDE2"/>
+                        <a:srgbClr val="2A2D33"/>
                       </a:solidFill>
                       <a:prstDash val="solid"/>
                       <a:round/>
@@ -6772,7 +6784,7 @@
                       <a:r>
                         <a:rPr lang="en-US" sz="1250" b="1" dirty="0">
                           <a:solidFill>
-                            <a:srgbClr val="1F7A4D"/>
+                            <a:srgbClr val="5CC98A"/>
                           </a:solidFill>
                         </a:rPr>
                         <a:t>done</a:t>
@@ -6792,7 +6804,7 @@
                     </a:lnT>
                     <a:lnB w="9525" cap="flat" cmpd="sng" algn="ctr">
                       <a:solidFill>
-                        <a:srgbClr val="DADDE2"/>
+                        <a:srgbClr val="2A2D33"/>
                       </a:solidFill>
                       <a:prstDash val="solid"/>
                       <a:round/>
@@ -6814,7 +6826,7 @@
                       <a:r>
                         <a:rPr lang="en-US" sz="1250" dirty="0">
                           <a:solidFill>
-                            <a:srgbClr val="4A5260"/>
+                            <a:srgbClr val="A9ACB2"/>
                           </a:solidFill>
                         </a:rPr>
                         <a:t>-O1 and fidelity report</a:t>
@@ -6834,7 +6846,7 @@
                     </a:lnT>
                     <a:lnB w="9525" cap="flat" cmpd="sng" algn="ctr">
                       <a:solidFill>
-                        <a:srgbClr val="DADDE2"/>
+                        <a:srgbClr val="2A2D33"/>
                       </a:solidFill>
                       <a:prstDash val="solid"/>
                       <a:round/>
@@ -6854,7 +6866,7 @@
                       <a:r>
                         <a:rPr lang="en-US" sz="1150" dirty="0">
                           <a:solidFill>
-                            <a:srgbClr val="4A5260"/>
+                            <a:srgbClr val="A9ACB2"/>
                           </a:solidFill>
                           <a:latin typeface="Consolas" pitchFamily="34" charset="0"/>
                           <a:ea typeface="Consolas" pitchFamily="34" charset="-122"/>
@@ -6881,7 +6893,7 @@
                     </a:lnT>
                     <a:lnB w="9525" cap="flat" cmpd="sng" algn="ctr">
                       <a:solidFill>
-                        <a:srgbClr val="DADDE2"/>
+                        <a:srgbClr val="2A2D33"/>
                       </a:solidFill>
                       <a:prstDash val="solid"/>
                       <a:round/>
@@ -6901,7 +6913,7 @@
                       <a:r>
                         <a:rPr lang="en-US" sz="1250" b="1" dirty="0">
                           <a:solidFill>
-                            <a:srgbClr val="9AA1AC"/>
+                            <a:srgbClr val="868A91"/>
                           </a:solidFill>
                         </a:rPr>
                         <a:t>M8</a:t>
@@ -6921,7 +6933,7 @@
                     </a:lnT>
                     <a:lnB w="9525" cap="flat" cmpd="sng" algn="ctr">
                       <a:solidFill>
-                        <a:srgbClr val="DADDE2"/>
+                        <a:srgbClr val="2A2D33"/>
                       </a:solidFill>
                       <a:prstDash val="solid"/>
                       <a:round/>
@@ -6965,7 +6977,7 @@
             <a:lvl1pPr>
               <a:defRPr sz="1000">
                 <a:solidFill>
-                  <a:srgbClr val="9AA1AC"/>
+                  <a:srgbClr val="868A91"/>
                 </a:solidFill>
                 <a:latin typeface="Consolas"/>
                 <a:ea typeface="Consolas"/>
@@ -7127,7 +7139,7 @@
           </a:prstGeom>
           <a:ln w="9525">
             <a:solidFill>
-              <a:srgbClr val="C3C8D0"/>
+              <a:srgbClr val="3A3D44"/>
             </a:solidFill>
             <a:prstDash val="solid"/>
           </a:ln>
@@ -7163,7 +7175,7 @@
                   <a:schemeClr val="tx1"/>
                 </a:solidFill>
               </a:rPr>
-              <a:t>Six phases</a:t>
+              <a:t>Six phases, one pipeline</a:t>
             </a:r>
             <a:endParaRPr lang="en-US" sz="1400" dirty="0"/>
           </a:p>
@@ -7199,7 +7211,7 @@
                   <a:schemeClr val="tx2"/>
                 </a:solidFill>
               </a:rPr>
-              <a:t>type checker, core tree and JavaScript are new tabs</a:t>
+              <a:t>click a phase to open what it produced</a:t>
             </a:r>
             <a:endParaRPr lang="en-US" sz="1250" dirty="0"/>
           </a:p>
@@ -7271,7 +7283,7 @@
                   <a:schemeClr val="tx2"/>
                 </a:solidFill>
               </a:rPr>
-              <a:t>the Tether code it maps to lights up</a:t>
+              <a:t>var$ lights up var; the status bar shows both positions</a:t>
             </a:r>
             <a:endParaRPr lang="en-US" sz="1250" dirty="0"/>
           </a:p>
@@ -7379,7 +7391,7 @@
             <a:lvl1pPr>
               <a:defRPr sz="1000">
                 <a:solidFill>
-                  <a:srgbClr val="9AA1AC"/>
+                  <a:srgbClr val="868A91"/>
                 </a:solidFill>
                 <a:latin typeface="Consolas"/>
                 <a:ea typeface="Consolas"/>
@@ -7516,11 +7528,11 @@
             <a:avLst/>
           </a:prstGeom>
           <a:solidFill>
-            <a:schemeClr val="tx1"/>
+            <a:srgbClr val="1E2025"/>
           </a:solidFill>
           <a:ln w="9525">
             <a:solidFill>
-              <a:srgbClr val="15181D"/>
+              <a:srgbClr val="4A4E55"/>
             </a:solidFill>
             <a:prstDash val="solid"/>
           </a:ln>
@@ -7553,7 +7565,7 @@
             <a:r>
               <a:rPr lang="en-US" sz="1100" b="1" dirty="0">
                 <a:solidFill>
-                  <a:schemeClr val="bg1"/>
+                  <a:schemeClr val="tx1"/>
                 </a:solidFill>
                 <a:latin typeface="Consolas" pitchFamily="34" charset="0"/>
                 <a:ea typeface="Consolas" pitchFamily="34" charset="-122"/>
@@ -7616,11 +7628,11 @@
             <a:avLst/>
           </a:prstGeom>
           <a:solidFill>
-            <a:schemeClr val="tx1"/>
+            <a:srgbClr val="1E2025"/>
           </a:solidFill>
           <a:ln w="9525">
             <a:solidFill>
-              <a:srgbClr val="15181D"/>
+              <a:srgbClr val="4A4E55"/>
             </a:solidFill>
             <a:prstDash val="solid"/>
           </a:ln>
@@ -7653,7 +7665,7 @@
             <a:r>
               <a:rPr lang="en-US" sz="1100" b="1" dirty="0">
                 <a:solidFill>
-                  <a:schemeClr val="bg1"/>
+                  <a:schemeClr val="tx1"/>
                 </a:solidFill>
                 <a:latin typeface="Consolas" pitchFamily="34" charset="0"/>
                 <a:ea typeface="Consolas" pitchFamily="34" charset="-122"/>
@@ -7716,11 +7728,11 @@
             <a:avLst/>
           </a:prstGeom>
           <a:solidFill>
-            <a:schemeClr val="tx1"/>
+            <a:srgbClr val="1E2025"/>
           </a:solidFill>
           <a:ln w="9525">
             <a:solidFill>
-              <a:srgbClr val="15181D"/>
+              <a:srgbClr val="4A4E55"/>
             </a:solidFill>
             <a:prstDash val="solid"/>
           </a:ln>
@@ -7753,7 +7765,7 @@
             <a:r>
               <a:rPr lang="en-US" sz="1100" b="1" dirty="0">
                 <a:solidFill>
-                  <a:schemeClr val="bg1"/>
+                  <a:schemeClr val="tx1"/>
                 </a:solidFill>
                 <a:latin typeface="Consolas" pitchFamily="34" charset="0"/>
                 <a:ea typeface="Consolas" pitchFamily="34" charset="-122"/>
@@ -7816,11 +7828,11 @@
             <a:avLst/>
           </a:prstGeom>
           <a:solidFill>
-            <a:schemeClr val="tx1"/>
+            <a:srgbClr val="1E2025"/>
           </a:solidFill>
           <a:ln w="9525">
             <a:solidFill>
-              <a:srgbClr val="15181D"/>
+              <a:srgbClr val="4A4E55"/>
             </a:solidFill>
             <a:prstDash val="solid"/>
           </a:ln>
@@ -7853,7 +7865,7 @@
             <a:r>
               <a:rPr lang="en-US" sz="1100" b="1" dirty="0">
                 <a:solidFill>
-                  <a:schemeClr val="bg1"/>
+                  <a:schemeClr val="tx1"/>
                 </a:solidFill>
                 <a:latin typeface="Consolas" pitchFamily="34" charset="0"/>
                 <a:ea typeface="Consolas" pitchFamily="34" charset="-122"/>
@@ -7916,11 +7928,11 @@
             <a:avLst/>
           </a:prstGeom>
           <a:solidFill>
-            <a:schemeClr val="tx1"/>
+            <a:srgbClr val="1E2025"/>
           </a:solidFill>
           <a:ln w="9525">
             <a:solidFill>
-              <a:srgbClr val="15181D"/>
+              <a:srgbClr val="4A4E55"/>
             </a:solidFill>
             <a:prstDash val="solid"/>
           </a:ln>
@@ -7953,7 +7965,7 @@
             <a:r>
               <a:rPr lang="en-US" sz="1100" b="1" dirty="0">
                 <a:solidFill>
-                  <a:schemeClr val="bg1"/>
+                  <a:schemeClr val="tx1"/>
                 </a:solidFill>
                 <a:latin typeface="Consolas" pitchFamily="34" charset="0"/>
                 <a:ea typeface="Consolas" pitchFamily="34" charset="-122"/>
@@ -8016,11 +8028,11 @@
             <a:avLst/>
           </a:prstGeom>
           <a:solidFill>
-            <a:schemeClr val="tx1"/>
+            <a:srgbClr val="1E2025"/>
           </a:solidFill>
           <a:ln w="9525">
             <a:solidFill>
-              <a:srgbClr val="15181D"/>
+              <a:srgbClr val="4A4E55"/>
             </a:solidFill>
             <a:prstDash val="solid"/>
           </a:ln>
@@ -8053,7 +8065,7 @@
             <a:r>
               <a:rPr lang="en-US" sz="1100" b="1" dirty="0">
                 <a:solidFill>
-                  <a:schemeClr val="bg1"/>
+                  <a:schemeClr val="tx1"/>
                 </a:solidFill>
                 <a:latin typeface="Consolas" pitchFamily="34" charset="0"/>
                 <a:ea typeface="Consolas" pitchFamily="34" charset="-122"/>
@@ -8120,7 +8132,7 @@
           </a:solidFill>
           <a:ln w="9525">
             <a:solidFill>
-              <a:srgbClr val="F5B82E"/>
+              <a:srgbClr val="F0B54A"/>
             </a:solidFill>
             <a:prstDash val="solid"/>
           </a:ln>
@@ -8153,7 +8165,7 @@
             <a:r>
               <a:rPr lang="en-US" sz="1100" b="1" dirty="0">
                 <a:solidFill>
-                  <a:schemeClr val="tx1"/>
+                  <a:srgbClr val="1A1305"/>
                 </a:solidFill>
                 <a:latin typeface="Consolas" pitchFamily="34" charset="0"/>
                 <a:ea typeface="Consolas" pitchFamily="34" charset="-122"/>
@@ -8216,11 +8228,11 @@
             <a:avLst/>
           </a:prstGeom>
           <a:solidFill>
-            <a:schemeClr val="bg1"/>
+            <a:srgbClr val="0F1012"/>
           </a:solidFill>
           <a:ln w="9525">
             <a:solidFill>
-              <a:srgbClr val="C3C8D0"/>
+              <a:srgbClr val="3A3D44"/>
             </a:solidFill>
             <a:prstDash val="solid"/>
           </a:ln>
@@ -8555,7 +8567,7 @@
             <a:lvl1pPr>
               <a:defRPr sz="1000">
                 <a:solidFill>
-                  <a:srgbClr val="9AA1AC"/>
+                  <a:srgbClr val="868A91"/>
                 </a:solidFill>
                 <a:latin typeface="Consolas"/>
                 <a:ea typeface="Consolas"/>
@@ -8692,9 +8704,13 @@
             <a:avLst/>
           </a:prstGeom>
           <a:solidFill>
-            <a:schemeClr val="tx1"/>
+            <a:srgbClr val="1E2025"/>
           </a:solidFill>
-          <a:ln/>
+          <a:ln w="9525">
+            <a:solidFill>
+              <a:srgbClr val="2E3138"/>
+            </a:solidFill>
+          </a:ln>
         </p:spPr>
       </p:sp>
       <p:sp>
@@ -8727,7 +8743,7 @@
             <a:r>
               <a:rPr lang="en-US" sz="1250" dirty="0">
                 <a:solidFill>
-                  <a:srgbClr val="8B93A1"/>
+                  <a:srgbClr val="8A8E96"/>
                 </a:solidFill>
                 <a:latin typeface="Consolas" pitchFamily="34" charset="0"/>
                 <a:ea typeface="Consolas" pitchFamily="34" charset="-122"/>
@@ -8747,7 +8763,7 @@
             <a:r>
               <a:rPr lang="en-US" sz="1250" dirty="0">
                 <a:solidFill>
-                  <a:srgbClr val="E4E7EC"/>
+                  <a:srgbClr val="E4E4E2"/>
                 </a:solidFill>
                 <a:latin typeface="Consolas" pitchFamily="34" charset="0"/>
                 <a:ea typeface="Consolas" pitchFamily="34" charset="-122"/>
@@ -8776,7 +8792,7 @@
             <a:r>
               <a:rPr lang="en-US" sz="1250" dirty="0">
                 <a:solidFill>
-                  <a:srgbClr val="8B93A1"/>
+                  <a:srgbClr val="8A8E96"/>
                 </a:solidFill>
                 <a:latin typeface="Consolas" pitchFamily="34" charset="0"/>
                 <a:ea typeface="Consolas" pitchFamily="34" charset="-122"/>
@@ -8796,7 +8812,7 @@
             <a:r>
               <a:rPr lang="en-US" sz="1250" dirty="0">
                 <a:solidFill>
-                  <a:srgbClr val="E4E7EC"/>
+                  <a:srgbClr val="E4E4E2"/>
                 </a:solidFill>
                 <a:latin typeface="Consolas" pitchFamily="34" charset="0"/>
                 <a:ea typeface="Consolas" pitchFamily="34" charset="-122"/>
@@ -8825,7 +8841,7 @@
             <a:r>
               <a:rPr lang="en-US" sz="1250" dirty="0">
                 <a:solidFill>
-                  <a:srgbClr val="8B93A1"/>
+                  <a:srgbClr val="8A8E96"/>
                 </a:solidFill>
                 <a:latin typeface="Consolas" pitchFamily="34" charset="0"/>
                 <a:ea typeface="Consolas" pitchFamily="34" charset="-122"/>
@@ -8845,7 +8861,7 @@
             <a:r>
               <a:rPr lang="en-US" sz="1250" dirty="0">
                 <a:solidFill>
-                  <a:srgbClr val="E4E7EC"/>
+                  <a:srgbClr val="E4E4E2"/>
                 </a:solidFill>
                 <a:latin typeface="Consolas" pitchFamily="34" charset="0"/>
                 <a:ea typeface="Consolas" pitchFamily="34" charset="-122"/>
@@ -8874,7 +8890,7 @@
             <a:r>
               <a:rPr lang="en-US" sz="1250" dirty="0">
                 <a:solidFill>
-                  <a:srgbClr val="8B93A1"/>
+                  <a:srgbClr val="8A8E96"/>
                 </a:solidFill>
                 <a:latin typeface="Consolas" pitchFamily="34" charset="0"/>
                 <a:ea typeface="Consolas" pitchFamily="34" charset="-122"/>
@@ -8894,7 +8910,7 @@
             <a:r>
               <a:rPr lang="en-US" sz="1250" dirty="0">
                 <a:solidFill>
-                  <a:srgbClr val="E4E7EC"/>
+                  <a:srgbClr val="E4E4E2"/>
                 </a:solidFill>
                 <a:latin typeface="Consolas" pitchFamily="34" charset="0"/>
                 <a:ea typeface="Consolas" pitchFamily="34" charset="-122"/>
@@ -8972,7 +8988,7 @@
             <a:lvl1pPr>
               <a:defRPr sz="1000">
                 <a:solidFill>
-                  <a:srgbClr val="9AA1AC"/>
+                  <a:srgbClr val="868A91"/>
                 </a:solidFill>
                 <a:latin typeface="Consolas"/>
                 <a:ea typeface="Consolas"/>
@@ -9085,7 +9101,7 @@
             <a:r>
               <a:rPr lang="en-US" sz="6000" b="1" dirty="0">
                 <a:solidFill>
-                  <a:schemeClr val="bg1"/>
+                  <a:schemeClr val="tx1"/>
                 </a:solidFill>
               </a:rPr>
               <a:t>Questions?</a:t>
@@ -9123,7 +9139,7 @@
             <a:r>
               <a:rPr lang="en-US" sz="2000" dirty="0">
                 <a:solidFill>
-                  <a:srgbClr val="C9CED6"/>
+                  <a:srgbClr val="B6B8BC"/>
                 </a:solidFill>
               </a:rPr>
               <a:t>Antra  ·  24BDS0066</a:t>
@@ -9179,7 +9195,7 @@
             <a:r>
               <a:rPr lang="en-US" sz="1800" dirty="0">
                 <a:solidFill>
-                  <a:srgbClr val="FFFFFF"/>
+                  <a:srgbClr val="E4E4E2"/>
                 </a:solidFill>
                 <a:latin typeface="Consolas" pitchFamily="34" charset="0"/>
                 <a:ea typeface="Consolas" pitchFamily="34" charset="-122"/>
@@ -9193,7 +9209,7 @@
             <a:r>
               <a:rPr lang="en-US" sz="1800" dirty="0">
                 <a:solidFill>
-                  <a:srgbClr val="15181D"/>
+                  <a:srgbClr val="1A1305"/>
                 </a:solidFill>
                 <a:latin typeface="Consolas" pitchFamily="34" charset="0"/>
                 <a:ea typeface="Consolas" pitchFamily="34" charset="-122"/>
@@ -9207,7 +9223,7 @@
             <a:r>
               <a:rPr lang="en-US" sz="1800" dirty="0">
                 <a:solidFill>
-                  <a:srgbClr val="FFFFFF"/>
+                  <a:srgbClr val="E4E4E2"/>
                 </a:solidFill>
                 <a:latin typeface="Consolas" pitchFamily="34" charset="0"/>
                 <a:ea typeface="Consolas" pitchFamily="34" charset="-122"/>
@@ -9236,7 +9252,7 @@
           <a:noFill/>
           <a:ln w="12700">
             <a:solidFill>
-              <a:srgbClr val="F5B82E"/>
+              <a:srgbClr val="F0B54A"/>
             </a:solidFill>
             <a:prstDash val="solid"/>
           </a:ln>
@@ -9716,7 +9732,7 @@
           <a:noFill/>
           <a:ln w="9525">
             <a:solidFill>
-              <a:srgbClr val="DADDE2"/>
+              <a:srgbClr val="2A2D33"/>
             </a:solidFill>
             <a:prstDash val="solid"/>
           </a:ln>
@@ -9752,7 +9768,7 @@
             <a:lvl1pPr>
               <a:defRPr sz="1000">
                 <a:solidFill>
-                  <a:srgbClr val="9AA1AC"/>
+                  <a:srgbClr val="868A91"/>
                 </a:solidFill>
                 <a:latin typeface="Consolas"/>
                 <a:ea typeface="Consolas"/>
@@ -9987,7 +10003,7 @@
                       <a:r>
                         <a:rPr lang="en-US" sz="1100" b="1" dirty="0">
                           <a:solidFill>
-                            <a:srgbClr val="4A5260"/>
+                            <a:srgbClr val="A9ACB2"/>
                           </a:solidFill>
                         </a:rPr>
                         <a:t>Acceptance criterion</a:t>
@@ -10007,7 +10023,7 @@
                     </a:lnT>
                     <a:lnB w="12700" cap="flat" cmpd="sng" algn="ctr">
                       <a:solidFill>
-                        <a:srgbClr val="15181D"/>
+                        <a:srgbClr val="4A4E55"/>
                       </a:solidFill>
                       <a:prstDash val="solid"/>
                       <a:round/>
@@ -10027,7 +10043,7 @@
                       <a:r>
                         <a:rPr lang="en-US" sz="1100" b="1" dirty="0">
                           <a:solidFill>
-                            <a:srgbClr val="4A5260"/>
+                            <a:srgbClr val="A9ACB2"/>
                           </a:solidFill>
                         </a:rPr>
                         <a:t>Status</a:t>
@@ -10047,7 +10063,7 @@
                     </a:lnT>
                     <a:lnB w="12700" cap="flat" cmpd="sng" algn="ctr">
                       <a:solidFill>
-                        <a:srgbClr val="15181D"/>
+                        <a:srgbClr val="4A4E55"/>
                       </a:solidFill>
                       <a:prstDash val="solid"/>
                       <a:round/>
@@ -10069,7 +10085,7 @@
                       <a:r>
                         <a:rPr lang="en-US" sz="1250" dirty="0">
                           <a:solidFill>
-                            <a:srgbClr val="15181D"/>
+                            <a:srgbClr val="E4E4E2"/>
                           </a:solidFill>
                         </a:rPr>
                         <a:t>AC-1  benchmarks print exactly their expected output</a:t>
@@ -10089,7 +10105,7 @@
                     </a:lnT>
                     <a:lnB w="9525" cap="flat" cmpd="sng" algn="ctr">
                       <a:solidFill>
-                        <a:srgbClr val="DADDE2"/>
+                        <a:srgbClr val="2A2D33"/>
                       </a:solidFill>
                       <a:prstDash val="solid"/>
                       <a:round/>
@@ -10109,7 +10125,7 @@
                       <a:r>
                         <a:rPr lang="en-US" sz="1250" b="1" dirty="0">
                           <a:solidFill>
-                            <a:srgbClr val="1F7A4D"/>
+                            <a:srgbClr val="5CC98A"/>
                           </a:solidFill>
                         </a:rPr>
                         <a:t>met</a:t>
@@ -10129,7 +10145,7 @@
                     </a:lnT>
                     <a:lnB w="9525" cap="flat" cmpd="sng" algn="ctr">
                       <a:solidFill>
-                        <a:srgbClr val="DADDE2"/>
+                        <a:srgbClr val="2A2D33"/>
                       </a:solidFill>
                       <a:prstDash val="solid"/>
                       <a:round/>
@@ -10151,7 +10167,7 @@
                       <a:r>
                         <a:rPr lang="en-US" sz="1250" dirty="0">
                           <a:solidFill>
-                            <a:srgbClr val="15181D"/>
+                            <a:srgbClr val="E4E4E2"/>
                           </a:solidFill>
                         </a:rPr>
                         <a:t>AC-3  every mapping round-trips through a decoder</a:t>
@@ -10171,7 +10187,7 @@
                     </a:lnT>
                     <a:lnB w="9525" cap="flat" cmpd="sng" algn="ctr">
                       <a:solidFill>
-                        <a:srgbClr val="DADDE2"/>
+                        <a:srgbClr val="2A2D33"/>
                       </a:solidFill>
                       <a:prstDash val="solid"/>
                       <a:round/>
@@ -10191,7 +10207,7 @@
                       <a:r>
                         <a:rPr lang="en-US" sz="1250" b="1" dirty="0">
                           <a:solidFill>
-                            <a:srgbClr val="1F7A4D"/>
+                            <a:srgbClr val="5CC98A"/>
                           </a:solidFill>
                         </a:rPr>
                         <a:t>met</a:t>
@@ -10211,7 +10227,7 @@
                     </a:lnT>
                     <a:lnB w="9525" cap="flat" cmpd="sng" algn="ctr">
                       <a:solidFill>
-                        <a:srgbClr val="DADDE2"/>
+                        <a:srgbClr val="2A2D33"/>
                       </a:solidFill>
                       <a:prstDash val="solid"/>
                       <a:round/>
@@ -10233,7 +10249,7 @@
                       <a:r>
                         <a:rPr lang="en-US" sz="1250" dirty="0">
                           <a:solidFill>
-                            <a:srgbClr val="15181D"/>
+                            <a:srgbClr val="E4E4E2"/>
                           </a:solidFill>
                         </a:rPr>
                         <a:t>AC-4  five semantic errors reported in one run</a:t>
@@ -10253,7 +10269,7 @@
                     </a:lnT>
                     <a:lnB w="9525" cap="flat" cmpd="sng" algn="ctr">
                       <a:solidFill>
-                        <a:srgbClr val="DADDE2"/>
+                        <a:srgbClr val="2A2D33"/>
                       </a:solidFill>
                       <a:prstDash val="solid"/>
                       <a:round/>
@@ -10273,7 +10289,7 @@
                       <a:r>
                         <a:rPr lang="en-US" sz="1250" b="1" dirty="0">
                           <a:solidFill>
-                            <a:srgbClr val="1F7A4D"/>
+                            <a:srgbClr val="5CC98A"/>
                           </a:solidFill>
                         </a:rPr>
                         <a:t>met (8)</a:t>
@@ -10293,7 +10309,7 @@
                     </a:lnT>
                     <a:lnB w="9525" cap="flat" cmpd="sng" algn="ctr">
                       <a:solidFill>
-                        <a:srgbClr val="DADDE2"/>
+                        <a:srgbClr val="2A2D33"/>
                       </a:solidFill>
                       <a:prstDash val="solid"/>
                       <a:round/>
@@ -10315,7 +10331,7 @@
                       <a:r>
                         <a:rPr lang="en-US" sz="1250" dirty="0">
                           <a:solidFill>
-                            <a:srgbClr val="4A5260"/>
+                            <a:srgbClr val="A9ACB2"/>
                           </a:solidFill>
                         </a:rPr>
                         <a:t>AC-2, AC-5  browser breakpoints, stack traces</a:t>
@@ -10335,7 +10351,7 @@
                     </a:lnT>
                     <a:lnB w="9525" cap="flat" cmpd="sng" algn="ctr">
                       <a:solidFill>
-                        <a:srgbClr val="DADDE2"/>
+                        <a:srgbClr val="2A2D33"/>
                       </a:solidFill>
                       <a:prstDash val="solid"/>
                       <a:round/>
@@ -10355,7 +10371,7 @@
                       <a:r>
                         <a:rPr lang="en-US" sz="1250" b="1" dirty="0">
                           <a:solidFill>
-                            <a:srgbClr val="9AA1AC"/>
+                            <a:srgbClr val="868A91"/>
                           </a:solidFill>
                         </a:rPr>
                         <a:t>M7</a:t>
@@ -10375,7 +10391,7 @@
                     </a:lnT>
                     <a:lnB w="9525" cap="flat" cmpd="sng" algn="ctr">
                       <a:solidFill>
-                        <a:srgbClr val="DADDE2"/>
+                        <a:srgbClr val="2A2D33"/>
                       </a:solidFill>
                       <a:prstDash val="solid"/>
                       <a:round/>
@@ -10397,7 +10413,7 @@
                       <a:r>
                         <a:rPr lang="en-US" sz="1250" dirty="0">
                           <a:solidFill>
-                            <a:srgbClr val="4A5260"/>
+                            <a:srgbClr val="A9ACB2"/>
                           </a:solidFill>
                         </a:rPr>
                         <a:t>AC-6  fidelity figures at -O0 and -O1</a:t>
@@ -10417,7 +10433,7 @@
                     </a:lnT>
                     <a:lnB w="9525" cap="flat" cmpd="sng" algn="ctr">
                       <a:solidFill>
-                        <a:srgbClr val="DADDE2"/>
+                        <a:srgbClr val="2A2D33"/>
                       </a:solidFill>
                       <a:prstDash val="solid"/>
                       <a:round/>
@@ -10437,7 +10453,7 @@
                       <a:r>
                         <a:rPr lang="en-US" sz="1250" b="1" dirty="0">
                           <a:solidFill>
-                            <a:srgbClr val="9AA1AC"/>
+                            <a:srgbClr val="868A91"/>
                           </a:solidFill>
                         </a:rPr>
                         <a:t>M8</a:t>
@@ -10457,7 +10473,7 @@
                     </a:lnT>
                     <a:lnB w="9525" cap="flat" cmpd="sng" algn="ctr">
                       <a:solidFill>
-                        <a:srgbClr val="DADDE2"/>
+                        <a:srgbClr val="2A2D33"/>
                       </a:solidFill>
                       <a:prstDash val="solid"/>
                       <a:round/>
@@ -10486,11 +10502,11 @@
             <a:avLst/>
           </a:prstGeom>
           <a:solidFill>
-            <a:schemeClr val="tx1"/>
+            <a:srgbClr val="1E2025"/>
           </a:solidFill>
           <a:ln w="9525">
             <a:solidFill>
-              <a:srgbClr val="15181D"/>
+              <a:srgbClr val="4A4E55"/>
             </a:solidFill>
             <a:prstDash val="solid"/>
           </a:ln>
@@ -10523,7 +10539,7 @@
             <a:r>
               <a:rPr lang="en-US" sz="1100" b="1" dirty="0">
                 <a:solidFill>
-                  <a:schemeClr val="bg1"/>
+                  <a:schemeClr val="tx1"/>
                 </a:solidFill>
                 <a:latin typeface="Consolas" pitchFamily="34" charset="0"/>
                 <a:ea typeface="Consolas" pitchFamily="34" charset="-122"/>
@@ -10586,11 +10602,11 @@
             <a:avLst/>
           </a:prstGeom>
           <a:solidFill>
-            <a:schemeClr val="tx1"/>
+            <a:srgbClr val="1E2025"/>
           </a:solidFill>
           <a:ln w="9525">
             <a:solidFill>
-              <a:srgbClr val="15181D"/>
+              <a:srgbClr val="4A4E55"/>
             </a:solidFill>
             <a:prstDash val="solid"/>
           </a:ln>
@@ -10623,7 +10639,7 @@
             <a:r>
               <a:rPr lang="en-US" sz="1100" b="1" dirty="0">
                 <a:solidFill>
-                  <a:schemeClr val="bg1"/>
+                  <a:schemeClr val="tx1"/>
                 </a:solidFill>
                 <a:latin typeface="Consolas" pitchFamily="34" charset="0"/>
                 <a:ea typeface="Consolas" pitchFamily="34" charset="-122"/>
@@ -10686,11 +10702,11 @@
             <a:avLst/>
           </a:prstGeom>
           <a:solidFill>
-            <a:schemeClr val="tx1"/>
+            <a:srgbClr val="1E2025"/>
           </a:solidFill>
           <a:ln w="9525">
             <a:solidFill>
-              <a:srgbClr val="15181D"/>
+              <a:srgbClr val="4A4E55"/>
             </a:solidFill>
             <a:prstDash val="solid"/>
           </a:ln>
@@ -10723,7 +10739,7 @@
             <a:r>
               <a:rPr lang="en-US" sz="1100" b="1" dirty="0">
                 <a:solidFill>
-                  <a:schemeClr val="bg1"/>
+                  <a:schemeClr val="tx1"/>
                 </a:solidFill>
                 <a:latin typeface="Consolas" pitchFamily="34" charset="0"/>
                 <a:ea typeface="Consolas" pitchFamily="34" charset="-122"/>
@@ -10786,11 +10802,11 @@
             <a:avLst/>
           </a:prstGeom>
           <a:solidFill>
-            <a:schemeClr val="tx1"/>
+            <a:srgbClr val="1E2025"/>
           </a:solidFill>
           <a:ln w="9525">
             <a:solidFill>
-              <a:srgbClr val="15181D"/>
+              <a:srgbClr val="4A4E55"/>
             </a:solidFill>
             <a:prstDash val="solid"/>
           </a:ln>
@@ -10823,7 +10839,7 @@
             <a:r>
               <a:rPr lang="en-US" sz="1100" b="1" dirty="0">
                 <a:solidFill>
-                  <a:schemeClr val="bg1"/>
+                  <a:schemeClr val="tx1"/>
                 </a:solidFill>
                 <a:latin typeface="Consolas" pitchFamily="34" charset="0"/>
                 <a:ea typeface="Consolas" pitchFamily="34" charset="-122"/>
@@ -10886,11 +10902,11 @@
             <a:avLst/>
           </a:prstGeom>
           <a:solidFill>
-            <a:schemeClr val="tx1"/>
+            <a:srgbClr val="1E2025"/>
           </a:solidFill>
           <a:ln w="9525">
             <a:solidFill>
-              <a:srgbClr val="15181D"/>
+              <a:srgbClr val="4A4E55"/>
             </a:solidFill>
             <a:prstDash val="solid"/>
           </a:ln>
@@ -10923,7 +10939,7 @@
             <a:r>
               <a:rPr lang="en-US" sz="1100" b="1" dirty="0">
                 <a:solidFill>
-                  <a:schemeClr val="bg1"/>
+                  <a:schemeClr val="tx1"/>
                 </a:solidFill>
                 <a:latin typeface="Consolas" pitchFamily="34" charset="0"/>
                 <a:ea typeface="Consolas" pitchFamily="34" charset="-122"/>
@@ -10986,11 +11002,11 @@
             <a:avLst/>
           </a:prstGeom>
           <a:solidFill>
-            <a:schemeClr val="tx1"/>
+            <a:srgbClr val="1E2025"/>
           </a:solidFill>
           <a:ln w="9525">
             <a:solidFill>
-              <a:srgbClr val="15181D"/>
+              <a:srgbClr val="4A4E55"/>
             </a:solidFill>
             <a:prstDash val="solid"/>
           </a:ln>
@@ -11023,7 +11039,7 @@
             <a:r>
               <a:rPr lang="en-US" sz="1100" b="1" dirty="0">
                 <a:solidFill>
-                  <a:schemeClr val="bg1"/>
+                  <a:schemeClr val="tx1"/>
                 </a:solidFill>
                 <a:latin typeface="Consolas" pitchFamily="34" charset="0"/>
                 <a:ea typeface="Consolas" pitchFamily="34" charset="-122"/>
@@ -11086,11 +11102,11 @@
             <a:avLst/>
           </a:prstGeom>
           <a:solidFill>
-            <a:schemeClr val="bg1"/>
+            <a:srgbClr val="0F1012"/>
           </a:solidFill>
           <a:ln w="9525">
             <a:solidFill>
-              <a:srgbClr val="C3C8D0"/>
+              <a:srgbClr val="3A3D44"/>
             </a:solidFill>
             <a:prstDash val="solid"/>
           </a:ln>
@@ -11186,11 +11202,11 @@
             <a:avLst/>
           </a:prstGeom>
           <a:solidFill>
-            <a:schemeClr val="bg1"/>
+            <a:srgbClr val="0F1012"/>
           </a:solidFill>
           <a:ln w="9525">
             <a:solidFill>
-              <a:srgbClr val="C3C8D0"/>
+              <a:srgbClr val="3A3D44"/>
             </a:solidFill>
             <a:prstDash val="solid"/>
           </a:ln>
@@ -11301,7 +11317,7 @@
             <a:lvl1pPr>
               <a:defRPr sz="1000">
                 <a:solidFill>
-                  <a:srgbClr val="9AA1AC"/>
+                  <a:srgbClr val="868A91"/>
                 </a:solidFill>
                 <a:latin typeface="Consolas"/>
                 <a:ea typeface="Consolas"/>
@@ -11516,11 +11532,11 @@
             <a:avLst/>
           </a:prstGeom>
           <a:solidFill>
-            <a:schemeClr val="tx1"/>
+            <a:srgbClr val="1E2025"/>
           </a:solidFill>
           <a:ln w="12700">
             <a:solidFill>
-              <a:srgbClr val="15181D"/>
+              <a:srgbClr val="4A4E55"/>
             </a:solidFill>
             <a:prstDash val="solid"/>
           </a:ln>
@@ -11553,7 +11569,7 @@
             <a:r>
               <a:rPr lang="en-US" sz="1300" b="1" dirty="0">
                 <a:solidFill>
-                  <a:schemeClr val="bg1"/>
+                  <a:schemeClr val="tx1"/>
                 </a:solidFill>
               </a:rPr>
               <a:t>Lexer</a:t>
@@ -11567,7 +11583,7 @@
             <a:r>
               <a:rPr lang="en-US" sz="1000" dirty="0">
                 <a:solidFill>
-                  <a:schemeClr val="bg1"/>
+                  <a:schemeClr val="tx1"/>
                 </a:solidFill>
                 <a:latin typeface="Consolas" pitchFamily="34" charset="0"/>
                 <a:ea typeface="Consolas" pitchFamily="34" charset="-122"/>
@@ -11596,7 +11612,7 @@
           <a:noFill/>
           <a:ln w="12700">
             <a:solidFill>
-              <a:srgbClr val="4A5260"/>
+              <a:srgbClr val="5A5E66"/>
             </a:solidFill>
             <a:prstDash val="solid"/>
             <a:tailEnd type="triangle"/>
@@ -11618,11 +11634,11 @@
             <a:avLst/>
           </a:prstGeom>
           <a:solidFill>
-            <a:schemeClr val="tx1"/>
+            <a:srgbClr val="1E2025"/>
           </a:solidFill>
           <a:ln w="12700">
             <a:solidFill>
-              <a:srgbClr val="15181D"/>
+              <a:srgbClr val="4A4E55"/>
             </a:solidFill>
             <a:prstDash val="solid"/>
           </a:ln>
@@ -11655,7 +11671,7 @@
             <a:r>
               <a:rPr lang="en-US" sz="1300" b="1" dirty="0">
                 <a:solidFill>
-                  <a:schemeClr val="bg1"/>
+                  <a:schemeClr val="tx1"/>
                 </a:solidFill>
               </a:rPr>
               <a:t>Parser</a:t>
@@ -11669,7 +11685,7 @@
             <a:r>
               <a:rPr lang="en-US" sz="1000" dirty="0">
                 <a:solidFill>
-                  <a:schemeClr val="bg1"/>
+                  <a:schemeClr val="tx1"/>
                 </a:solidFill>
                 <a:latin typeface="Consolas" pitchFamily="34" charset="0"/>
                 <a:ea typeface="Consolas" pitchFamily="34" charset="-122"/>
@@ -11698,7 +11714,7 @@
           <a:noFill/>
           <a:ln w="12700">
             <a:solidFill>
-              <a:srgbClr val="4A5260"/>
+              <a:srgbClr val="5A5E66"/>
             </a:solidFill>
             <a:prstDash val="solid"/>
             <a:tailEnd type="triangle"/>
@@ -11720,11 +11736,11 @@
             <a:avLst/>
           </a:prstGeom>
           <a:solidFill>
-            <a:schemeClr val="tx1"/>
+            <a:srgbClr val="1E2025"/>
           </a:solidFill>
           <a:ln w="12700">
             <a:solidFill>
-              <a:srgbClr val="15181D"/>
+              <a:srgbClr val="4A4E55"/>
             </a:solidFill>
             <a:prstDash val="solid"/>
           </a:ln>
@@ -11757,7 +11773,7 @@
             <a:r>
               <a:rPr lang="en-US" sz="1300" b="1" dirty="0">
                 <a:solidFill>
-                  <a:schemeClr val="bg1"/>
+                  <a:schemeClr val="tx1"/>
                 </a:solidFill>
               </a:rPr>
               <a:t>Type checker</a:t>
@@ -11771,7 +11787,7 @@
             <a:r>
               <a:rPr lang="en-US" sz="1000" dirty="0">
                 <a:solidFill>
-                  <a:schemeClr val="bg1"/>
+                  <a:schemeClr val="tx1"/>
                 </a:solidFill>
                 <a:latin typeface="Consolas" pitchFamily="34" charset="0"/>
                 <a:ea typeface="Consolas" pitchFamily="34" charset="-122"/>
@@ -11800,7 +11816,7 @@
           <a:noFill/>
           <a:ln w="12700">
             <a:solidFill>
-              <a:srgbClr val="4A5260"/>
+              <a:srgbClr val="5A5E66"/>
             </a:solidFill>
             <a:prstDash val="solid"/>
             <a:tailEnd type="triangle"/>
@@ -11822,11 +11838,11 @@
             <a:avLst/>
           </a:prstGeom>
           <a:solidFill>
-            <a:schemeClr val="tx1"/>
+            <a:srgbClr val="1E2025"/>
           </a:solidFill>
           <a:ln w="12700">
             <a:solidFill>
-              <a:srgbClr val="15181D"/>
+              <a:srgbClr val="4A4E55"/>
             </a:solidFill>
             <a:prstDash val="solid"/>
           </a:ln>
@@ -11859,7 +11875,7 @@
             <a:r>
               <a:rPr lang="en-US" sz="1300" b="1" dirty="0">
                 <a:solidFill>
-                  <a:schemeClr val="bg1"/>
+                  <a:schemeClr val="tx1"/>
                 </a:solidFill>
               </a:rPr>
               <a:t>Lowering</a:t>
@@ -11873,7 +11889,7 @@
             <a:r>
               <a:rPr lang="en-US" sz="1000" dirty="0">
                 <a:solidFill>
-                  <a:schemeClr val="bg1"/>
+                  <a:schemeClr val="tx1"/>
                 </a:solidFill>
                 <a:latin typeface="Consolas" pitchFamily="34" charset="0"/>
                 <a:ea typeface="Consolas" pitchFamily="34" charset="-122"/>
@@ -11902,7 +11918,7 @@
           <a:noFill/>
           <a:ln w="12700">
             <a:solidFill>
-              <a:srgbClr val="4A5260"/>
+              <a:srgbClr val="5A5E66"/>
             </a:solidFill>
             <a:prstDash val="solid"/>
             <a:tailEnd type="triangle"/>
@@ -11924,11 +11940,11 @@
             <a:avLst/>
           </a:prstGeom>
           <a:solidFill>
-            <a:schemeClr val="tx1"/>
+            <a:srgbClr val="1E2025"/>
           </a:solidFill>
           <a:ln w="12700">
             <a:solidFill>
-              <a:srgbClr val="15181D"/>
+              <a:srgbClr val="4A4E55"/>
             </a:solidFill>
             <a:prstDash val="solid"/>
           </a:ln>
@@ -11961,7 +11977,7 @@
             <a:r>
               <a:rPr lang="en-US" sz="1300" b="1" dirty="0">
                 <a:solidFill>
-                  <a:schemeClr val="bg1"/>
+                  <a:schemeClr val="tx1"/>
                 </a:solidFill>
               </a:rPr>
               <a:t>JS emitter</a:t>
@@ -11975,7 +11991,7 @@
             <a:r>
               <a:rPr lang="en-US" sz="1000" dirty="0">
                 <a:solidFill>
-                  <a:schemeClr val="bg1"/>
+                  <a:schemeClr val="tx1"/>
                 </a:solidFill>
                 <a:latin typeface="Consolas" pitchFamily="34" charset="0"/>
                 <a:ea typeface="Consolas" pitchFamily="34" charset="-122"/>
@@ -12004,7 +12020,7 @@
           <a:noFill/>
           <a:ln w="12700">
             <a:solidFill>
-              <a:srgbClr val="4A5260"/>
+              <a:srgbClr val="5A5E66"/>
             </a:solidFill>
             <a:prstDash val="solid"/>
             <a:tailEnd type="triangle"/>
@@ -12026,11 +12042,11 @@
             <a:avLst/>
           </a:prstGeom>
           <a:solidFill>
-            <a:schemeClr val="tx1"/>
+            <a:srgbClr val="1E2025"/>
           </a:solidFill>
           <a:ln w="12700">
             <a:solidFill>
-              <a:srgbClr val="15181D"/>
+              <a:srgbClr val="4A4E55"/>
             </a:solidFill>
             <a:prstDash val="solid"/>
           </a:ln>
@@ -12063,7 +12079,7 @@
             <a:r>
               <a:rPr lang="en-US" sz="1300" b="1" dirty="0">
                 <a:solidFill>
-                  <a:schemeClr val="bg1"/>
+                  <a:schemeClr val="tx1"/>
                 </a:solidFill>
               </a:rPr>
               <a:t>Source map</a:t>
@@ -12077,7 +12093,7 @@
             <a:r>
               <a:rPr lang="en-US" sz="1000" dirty="0">
                 <a:solidFill>
-                  <a:schemeClr val="bg1"/>
+                  <a:schemeClr val="tx1"/>
                 </a:solidFill>
                 <a:latin typeface="Consolas" pitchFamily="34" charset="0"/>
                 <a:ea typeface="Consolas" pitchFamily="34" charset="-122"/>
@@ -12104,11 +12120,11 @@
             <a:avLst/>
           </a:prstGeom>
           <a:solidFill>
-            <a:schemeClr val="bg1"/>
+            <a:srgbClr val="0F1012"/>
           </a:solidFill>
           <a:ln w="12700">
             <a:solidFill>
-              <a:srgbClr val="15181D"/>
+              <a:srgbClr val="4A4E55"/>
             </a:solidFill>
             <a:prstDash val="solid"/>
           </a:ln>
@@ -12305,7 +12321,7 @@
             <a:lvl1pPr>
               <a:defRPr sz="1000">
                 <a:solidFill>
-                  <a:srgbClr val="9AA1AC"/>
+                  <a:srgbClr val="868A91"/>
                 </a:solidFill>
                 <a:latin typeface="Consolas"/>
                 <a:ea typeface="Consolas"/>
@@ -12442,9 +12458,13 @@
             <a:avLst/>
           </a:prstGeom>
           <a:solidFill>
-            <a:schemeClr val="tx1"/>
+            <a:srgbClr val="1E2025"/>
           </a:solidFill>
-          <a:ln/>
+          <a:ln w="9525">
+            <a:solidFill>
+              <a:srgbClr val="2E3138"/>
+            </a:solidFill>
+          </a:ln>
         </p:spPr>
       </p:sp>
       <p:sp>
@@ -12477,7 +12497,7 @@
             <a:r>
               <a:rPr lang="en-US" sz="1100" dirty="0">
                 <a:solidFill>
-                  <a:srgbClr val="8B93A1"/>
+                  <a:srgbClr val="8A8E96"/>
                 </a:solidFill>
                 <a:latin typeface="Consolas" pitchFamily="34" charset="0"/>
                 <a:ea typeface="Consolas" pitchFamily="34" charset="-122"/>
@@ -12497,7 +12517,7 @@
             <a:r>
               <a:rPr lang="en-US" sz="1100" dirty="0">
                 <a:solidFill>
-                  <a:srgbClr val="E4E7EC"/>
+                  <a:srgbClr val="E4E4E2"/>
                 </a:solidFill>
                 <a:latin typeface="Consolas" pitchFamily="34" charset="0"/>
                 <a:ea typeface="Consolas" pitchFamily="34" charset="-122"/>
@@ -12514,7 +12534,7 @@
             <a:r>
               <a:rPr lang="en-US" sz="1100" dirty="0">
                 <a:solidFill>
-                  <a:srgbClr val="FF8A80"/>
+                  <a:srgbClr val="FF6F6B"/>
                 </a:solidFill>
                 <a:latin typeface="Consolas" pitchFamily="34" charset="0"/>
                 <a:ea typeface="Consolas" pitchFamily="34" charset="-122"/>
@@ -12531,7 +12551,7 @@
             <a:r>
               <a:rPr lang="en-US" sz="1100" dirty="0">
                 <a:solidFill>
-                  <a:srgbClr val="E4E7EC"/>
+                  <a:srgbClr val="E4E4E2"/>
                 </a:solidFill>
                 <a:latin typeface="Consolas" pitchFamily="34" charset="0"/>
                 <a:ea typeface="Consolas" pitchFamily="34" charset="-122"/>
@@ -12551,7 +12571,7 @@
             <a:r>
               <a:rPr lang="en-US" sz="1100" dirty="0">
                 <a:solidFill>
-                  <a:srgbClr val="E4E7EC"/>
+                  <a:srgbClr val="E4E4E2"/>
                 </a:solidFill>
                 <a:latin typeface="Consolas" pitchFamily="34" charset="0"/>
                 <a:ea typeface="Consolas" pitchFamily="34" charset="-122"/>
@@ -12571,7 +12591,7 @@
             <a:r>
               <a:rPr lang="en-US" sz="1100" dirty="0">
                 <a:solidFill>
-                  <a:srgbClr val="E4E7EC"/>
+                  <a:srgbClr val="E4E4E2"/>
                 </a:solidFill>
                 <a:latin typeface="Consolas" pitchFamily="34" charset="0"/>
                 <a:ea typeface="Consolas" pitchFamily="34" charset="-122"/>
@@ -12591,7 +12611,7 @@
             <a:r>
               <a:rPr lang="en-US" sz="1100" dirty="0">
                 <a:solidFill>
-                  <a:srgbClr val="E4E7EC"/>
+                  <a:srgbClr val="E4E4E2"/>
                 </a:solidFill>
                 <a:latin typeface="Consolas" pitchFamily="34" charset="0"/>
                 <a:ea typeface="Consolas" pitchFamily="34" charset="-122"/>
@@ -12608,7 +12628,7 @@
             <a:r>
               <a:rPr lang="en-US" sz="1100" dirty="0">
                 <a:solidFill>
-                  <a:srgbClr val="F5B82E"/>
+                  <a:srgbClr val="F0B54A"/>
                 </a:solidFill>
                 <a:latin typeface="Consolas" pitchFamily="34" charset="0"/>
                 <a:ea typeface="Consolas" pitchFamily="34" charset="-122"/>
@@ -12628,7 +12648,7 @@
             <a:r>
               <a:rPr lang="en-US" sz="1100" dirty="0">
                 <a:solidFill>
-                  <a:srgbClr val="E4E7EC"/>
+                  <a:srgbClr val="E4E4E2"/>
                 </a:solidFill>
                 <a:latin typeface="Consolas" pitchFamily="34" charset="0"/>
                 <a:ea typeface="Consolas" pitchFamily="34" charset="-122"/>
@@ -12645,7 +12665,7 @@
             <a:r>
               <a:rPr lang="en-US" sz="1100" dirty="0">
                 <a:solidFill>
-                  <a:srgbClr val="8B93A1"/>
+                  <a:srgbClr val="8A8E96"/>
                 </a:solidFill>
                 <a:latin typeface="Consolas" pitchFamily="34" charset="0"/>
                 <a:ea typeface="Consolas" pitchFamily="34" charset="-122"/>
@@ -12662,7 +12682,7 @@
             <a:r>
               <a:rPr lang="en-US" sz="1100" dirty="0">
                 <a:solidFill>
-                  <a:srgbClr val="E4E7EC"/>
+                  <a:srgbClr val="E4E4E2"/>
                 </a:solidFill>
                 <a:latin typeface="Consolas" pitchFamily="34" charset="0"/>
                 <a:ea typeface="Consolas" pitchFamily="34" charset="-122"/>
@@ -12682,7 +12702,7 @@
             <a:r>
               <a:rPr lang="en-US" sz="1100" dirty="0">
                 <a:solidFill>
-                  <a:srgbClr val="E4E7EC"/>
+                  <a:srgbClr val="E4E4E2"/>
                 </a:solidFill>
                 <a:latin typeface="Consolas" pitchFamily="34" charset="0"/>
                 <a:ea typeface="Consolas" pitchFamily="34" charset="-122"/>
@@ -12699,7 +12719,7 @@
             <a:r>
               <a:rPr lang="en-US" sz="1100" dirty="0">
                 <a:solidFill>
-                  <a:srgbClr val="FF8A80"/>
+                  <a:srgbClr val="FF6F6B"/>
                 </a:solidFill>
                 <a:latin typeface="Consolas" pitchFamily="34" charset="0"/>
                 <a:ea typeface="Consolas" pitchFamily="34" charset="-122"/>
@@ -12716,7 +12736,7 @@
             <a:r>
               <a:rPr lang="en-US" sz="1100" dirty="0">
                 <a:solidFill>
-                  <a:srgbClr val="E4E7EC"/>
+                  <a:srgbClr val="E4E4E2"/>
                 </a:solidFill>
                 <a:latin typeface="Consolas" pitchFamily="34" charset="0"/>
                 <a:ea typeface="Consolas" pitchFamily="34" charset="-122"/>
@@ -12736,7 +12756,7 @@
             <a:r>
               <a:rPr lang="en-US" sz="1100" dirty="0">
                 <a:solidFill>
-                  <a:srgbClr val="E4E7EC"/>
+                  <a:srgbClr val="E4E4E2"/>
                 </a:solidFill>
                 <a:latin typeface="Consolas" pitchFamily="34" charset="0"/>
                 <a:ea typeface="Consolas" pitchFamily="34" charset="-122"/>
@@ -12753,7 +12773,7 @@
             <a:r>
               <a:rPr lang="en-US" sz="1100" dirty="0">
                 <a:solidFill>
-                  <a:srgbClr val="8B93A1"/>
+                  <a:srgbClr val="8A8E96"/>
                 </a:solidFill>
                 <a:latin typeface="Consolas" pitchFamily="34" charset="0"/>
                 <a:ea typeface="Consolas" pitchFamily="34" charset="-122"/>
@@ -12770,7 +12790,7 @@
             <a:r>
               <a:rPr lang="en-US" sz="1100" dirty="0">
                 <a:solidFill>
-                  <a:srgbClr val="E4E7EC"/>
+                  <a:srgbClr val="E4E4E2"/>
                 </a:solidFill>
                 <a:latin typeface="Consolas" pitchFamily="34" charset="0"/>
                 <a:ea typeface="Consolas" pitchFamily="34" charset="-122"/>
@@ -12790,7 +12810,7 @@
             <a:r>
               <a:rPr lang="en-US" sz="1100" dirty="0">
                 <a:solidFill>
-                  <a:srgbClr val="E4E7EC"/>
+                  <a:srgbClr val="E4E4E2"/>
                 </a:solidFill>
                 <a:latin typeface="Consolas" pitchFamily="34" charset="0"/>
                 <a:ea typeface="Consolas" pitchFamily="34" charset="-122"/>
@@ -12807,7 +12827,7 @@
             <a:r>
               <a:rPr lang="en-US" sz="1100" dirty="0">
                 <a:solidFill>
-                  <a:srgbClr val="FF8A80"/>
+                  <a:srgbClr val="FF6F6B"/>
                 </a:solidFill>
                 <a:latin typeface="Consolas" pitchFamily="34" charset="0"/>
                 <a:ea typeface="Consolas" pitchFamily="34" charset="-122"/>
@@ -12824,7 +12844,7 @@
             <a:r>
               <a:rPr lang="en-US" sz="1100" dirty="0">
                 <a:solidFill>
-                  <a:srgbClr val="E4E7EC"/>
+                  <a:srgbClr val="E4E4E2"/>
                 </a:solidFill>
                 <a:latin typeface="Consolas" pitchFamily="34" charset="0"/>
                 <a:ea typeface="Consolas" pitchFamily="34" charset="-122"/>
@@ -12844,7 +12864,7 @@
             <a:r>
               <a:rPr lang="en-US" sz="1100" dirty="0">
                 <a:solidFill>
-                  <a:srgbClr val="E4E7EC"/>
+                  <a:srgbClr val="E4E4E2"/>
                 </a:solidFill>
                 <a:latin typeface="Consolas" pitchFamily="34" charset="0"/>
                 <a:ea typeface="Consolas" pitchFamily="34" charset="-122"/>
@@ -12864,7 +12884,7 @@
             <a:r>
               <a:rPr lang="en-US" sz="1100" dirty="0">
                 <a:solidFill>
-                  <a:srgbClr val="8B93A1"/>
+                  <a:srgbClr val="8A8E96"/>
                 </a:solidFill>
                 <a:latin typeface="Consolas" pitchFamily="34" charset="0"/>
                 <a:ea typeface="Consolas" pitchFamily="34" charset="-122"/>
@@ -12884,7 +12904,7 @@
             <a:r>
               <a:rPr lang="en-US" sz="1100" dirty="0">
                 <a:solidFill>
-                  <a:srgbClr val="FF8A80"/>
+                  <a:srgbClr val="FF6F6B"/>
                 </a:solidFill>
                 <a:latin typeface="Consolas" pitchFamily="34" charset="0"/>
                 <a:ea typeface="Consolas" pitchFamily="34" charset="-122"/>
@@ -13214,7 +13234,7 @@
             <a:lvl1pPr>
               <a:defRPr sz="1000">
                 <a:solidFill>
-                  <a:srgbClr val="9AA1AC"/>
+                  <a:srgbClr val="868A91"/>
                 </a:solidFill>
                 <a:latin typeface="Consolas"/>
                 <a:ea typeface="Consolas"/>
@@ -13351,11 +13371,11 @@
             <a:avLst/>
           </a:prstGeom>
           <a:solidFill>
-            <a:srgbClr val="F3F4F6"/>
+            <a:srgbClr val="18191D"/>
           </a:solidFill>
           <a:ln w="12700">
             <a:solidFill>
-              <a:srgbClr val="15181D"/>
+              <a:srgbClr val="4A4E55"/>
             </a:solidFill>
             <a:prstDash val="solid"/>
           </a:ln>
@@ -13402,7 +13422,7 @@
             <a:r>
               <a:rPr lang="en-US" sz="1100" dirty="0">
                 <a:solidFill>
-                  <a:srgbClr val="4A5260"/>
+                  <a:srgbClr val="A9ACB2"/>
                 </a:solidFill>
               </a:rPr>
               <a:t>every function, collected first</a:t>
@@ -13426,11 +13446,11 @@
             <a:avLst/>
           </a:prstGeom>
           <a:solidFill>
-            <a:schemeClr val="bg1"/>
+            <a:srgbClr val="0F1012"/>
           </a:solidFill>
           <a:ln w="12700">
             <a:solidFill>
-              <a:srgbClr val="15181D"/>
+              <a:srgbClr val="4A4E55"/>
             </a:solidFill>
             <a:prstDash val="solid"/>
           </a:ln>
@@ -13477,7 +13497,7 @@
             <a:r>
               <a:rPr lang="en-US" sz="1100" dirty="0">
                 <a:solidFill>
-                  <a:srgbClr val="4A5260"/>
+                  <a:srgbClr val="A9ACB2"/>
                 </a:solidFill>
               </a:rPr>
               <a:t>top-level let</a:t>
@@ -13501,11 +13521,11 @@
             <a:avLst/>
           </a:prstGeom>
           <a:solidFill>
-            <a:schemeClr val="bg1"/>
+            <a:srgbClr val="0F1012"/>
           </a:solidFill>
           <a:ln w="12700">
             <a:solidFill>
-              <a:srgbClr val="15181D"/>
+              <a:srgbClr val="4A4E55"/>
             </a:solidFill>
             <a:prstDash val="solid"/>
           </a:ln>
@@ -13552,7 +13572,7 @@
             <a:r>
               <a:rPr lang="en-US" sz="1100" dirty="0">
                 <a:solidFill>
-                  <a:srgbClr val="4A5260"/>
+                  <a:srgbClr val="A9ACB2"/>
                 </a:solidFill>
               </a:rPr>
               <a:t>parameters and locals</a:t>
@@ -13576,11 +13596,11 @@
             <a:avLst/>
           </a:prstGeom>
           <a:solidFill>
-            <a:schemeClr val="bg1"/>
+            <a:srgbClr val="0F1012"/>
           </a:solidFill>
           <a:ln w="12700">
             <a:solidFill>
-              <a:srgbClr val="15181D"/>
+              <a:srgbClr val="4A4E55"/>
             </a:solidFill>
             <a:prstDash val="solid"/>
           </a:ln>
@@ -13627,7 +13647,7 @@
             <a:r>
               <a:rPr lang="en-US" sz="1100" dirty="0">
                 <a:solidFill>
-                  <a:srgbClr val="4A5260"/>
+                  <a:srgbClr val="A9ACB2"/>
                 </a:solidFill>
               </a:rPr>
               <a:t>nested scopes</a:t>
@@ -13651,11 +13671,11 @@
             <a:avLst/>
           </a:prstGeom>
           <a:solidFill>
-            <a:schemeClr val="bg1"/>
+            <a:srgbClr val="0F1012"/>
           </a:solidFill>
           <a:ln w="12700">
             <a:solidFill>
-              <a:srgbClr val="15181D"/>
+              <a:srgbClr val="4A4E55"/>
             </a:solidFill>
             <a:prstDash val="solid"/>
           </a:ln>
@@ -13702,7 +13722,7 @@
             <a:r>
               <a:rPr lang="en-US" sz="1100" dirty="0">
                 <a:solidFill>
-                  <a:srgbClr val="4A5260"/>
+                  <a:srgbClr val="A9ACB2"/>
                 </a:solidFill>
               </a:rPr>
               <a:t>nested scopes</a:t>
@@ -13728,7 +13748,7 @@
           <a:noFill/>
           <a:ln w="12700">
             <a:solidFill>
-              <a:srgbClr val="4A5260"/>
+              <a:srgbClr val="5A5E66"/>
             </a:solidFill>
             <a:prstDash val="solid"/>
           </a:ln>
@@ -13751,7 +13771,7 @@
           <a:noFill/>
           <a:ln w="12700">
             <a:solidFill>
-              <a:srgbClr val="4A5260"/>
+              <a:srgbClr val="5A5E66"/>
             </a:solidFill>
             <a:prstDash val="solid"/>
           </a:ln>
@@ -13774,7 +13794,7 @@
           <a:noFill/>
           <a:ln w="12700">
             <a:solidFill>
-              <a:srgbClr val="4A5260"/>
+              <a:srgbClr val="5A5E66"/>
             </a:solidFill>
             <a:prstDash val="solid"/>
           </a:ln>
@@ -13797,7 +13817,7 @@
           <a:noFill/>
           <a:ln w="12700">
             <a:solidFill>
-              <a:srgbClr val="4A5260"/>
+              <a:srgbClr val="5A5E66"/>
             </a:solidFill>
             <a:prstDash val="solid"/>
           </a:ln>
@@ -13890,9 +13910,13 @@
             <a:avLst/>
           </a:prstGeom>
           <a:solidFill>
-            <a:schemeClr val="tx1"/>
+            <a:srgbClr val="1E2025"/>
           </a:solidFill>
-          <a:ln/>
+          <a:ln w="9525">
+            <a:solidFill>
+              <a:srgbClr val="2E3138"/>
+            </a:solidFill>
+          </a:ln>
         </p:spPr>
       </p:sp>
       <p:sp>
@@ -13925,7 +13949,7 @@
             <a:r>
               <a:rPr lang="en-US" sz="1300" dirty="0">
                 <a:solidFill>
-                  <a:srgbClr val="E4E7EC"/>
+                  <a:srgbClr val="E4E4E2"/>
                 </a:solidFill>
                 <a:latin typeface="Consolas" pitchFamily="34" charset="0"/>
                 <a:ea typeface="Consolas" pitchFamily="34" charset="-122"/>
@@ -13945,7 +13969,7 @@
             <a:r>
               <a:rPr lang="en-US" sz="1300" dirty="0">
                 <a:solidFill>
-                  <a:srgbClr val="E4E7EC"/>
+                  <a:srgbClr val="E4E4E2"/>
                 </a:solidFill>
                 <a:latin typeface="Consolas" pitchFamily="34" charset="0"/>
                 <a:ea typeface="Consolas" pitchFamily="34" charset="-122"/>
@@ -13962,7 +13986,7 @@
             <a:r>
               <a:rPr lang="en-US" sz="1300" dirty="0">
                 <a:solidFill>
-                  <a:srgbClr val="F5B82E"/>
+                  <a:srgbClr val="F0B54A"/>
                 </a:solidFill>
                 <a:latin typeface="Consolas" pitchFamily="34" charset="0"/>
                 <a:ea typeface="Consolas" pitchFamily="34" charset="-122"/>
@@ -13979,7 +14003,7 @@
             <a:r>
               <a:rPr lang="en-US" sz="1300" dirty="0">
                 <a:solidFill>
-                  <a:srgbClr val="E4E7EC"/>
+                  <a:srgbClr val="E4E4E2"/>
                 </a:solidFill>
                 <a:latin typeface="Consolas" pitchFamily="34" charset="0"/>
                 <a:ea typeface="Consolas" pitchFamily="34" charset="-122"/>
@@ -14042,9 +14066,13 @@
             <a:avLst/>
           </a:prstGeom>
           <a:solidFill>
-            <a:schemeClr val="tx1"/>
+            <a:srgbClr val="1E2025"/>
           </a:solidFill>
-          <a:ln/>
+          <a:ln w="9525">
+            <a:solidFill>
+              <a:srgbClr val="2E3138"/>
+            </a:solidFill>
+          </a:ln>
         </p:spPr>
       </p:sp>
       <p:sp>
@@ -14077,7 +14105,7 @@
             <a:r>
               <a:rPr lang="en-US" sz="1300" dirty="0">
                 <a:solidFill>
-                  <a:srgbClr val="E4E7EC"/>
+                  <a:srgbClr val="E4E4E2"/>
                 </a:solidFill>
                 <a:latin typeface="Consolas" pitchFamily="34" charset="0"/>
                 <a:ea typeface="Consolas" pitchFamily="34" charset="-122"/>
@@ -14097,7 +14125,7 @@
             <a:r>
               <a:rPr lang="en-US" sz="1300" dirty="0">
                 <a:solidFill>
-                  <a:srgbClr val="E4E7EC"/>
+                  <a:srgbClr val="E4E4E2"/>
                 </a:solidFill>
                 <a:latin typeface="Consolas" pitchFamily="34" charset="0"/>
                 <a:ea typeface="Consolas" pitchFamily="34" charset="-122"/>
@@ -14114,7 +14142,7 @@
             <a:r>
               <a:rPr lang="en-US" sz="1300" dirty="0">
                 <a:solidFill>
-                  <a:srgbClr val="F5B82E"/>
+                  <a:srgbClr val="F0B54A"/>
                 </a:solidFill>
                 <a:latin typeface="Consolas" pitchFamily="34" charset="0"/>
                 <a:ea typeface="Consolas" pitchFamily="34" charset="-122"/>
@@ -14131,7 +14159,7 @@
             <a:r>
               <a:rPr lang="en-US" sz="1300" dirty="0">
                 <a:solidFill>
-                  <a:srgbClr val="E4E7EC"/>
+                  <a:srgbClr val="E4E4E2"/>
                 </a:solidFill>
                 <a:latin typeface="Consolas" pitchFamily="34" charset="0"/>
                 <a:ea typeface="Consolas" pitchFamily="34" charset="-122"/>
@@ -14209,7 +14237,7 @@
             <a:lvl1pPr>
               <a:defRPr sz="1000">
                 <a:solidFill>
-                  <a:srgbClr val="9AA1AC"/>
+                  <a:srgbClr val="868A91"/>
                 </a:solidFill>
                 <a:latin typeface="Consolas"/>
                 <a:ea typeface="Consolas"/>
@@ -14369,7 +14397,7 @@
                       <a:r>
                         <a:rPr lang="en-US" sz="1100" b="1" dirty="0">
                           <a:solidFill>
-                            <a:srgbClr val="4A5260"/>
+                            <a:srgbClr val="A9ACB2"/>
                           </a:solidFill>
                         </a:rPr>
                         <a:t>Tether</a:t>
@@ -14389,7 +14417,7 @@
                     </a:lnT>
                     <a:lnB w="12700" cap="flat" cmpd="sng" algn="ctr">
                       <a:solidFill>
-                        <a:srgbClr val="15181D"/>
+                        <a:srgbClr val="4A4E55"/>
                       </a:solidFill>
                       <a:prstDash val="solid"/>
                       <a:round/>
@@ -14409,7 +14437,7 @@
                       <a:r>
                         <a:rPr lang="en-US" sz="1100" b="1" dirty="0">
                           <a:solidFill>
-                            <a:srgbClr val="4A5260"/>
+                            <a:srgbClr val="A9ACB2"/>
                           </a:solidFill>
                         </a:rPr>
                         <a:t>Core form after lowering</a:t>
@@ -14429,7 +14457,7 @@
                     </a:lnT>
                     <a:lnB w="12700" cap="flat" cmpd="sng" algn="ctr">
                       <a:solidFill>
-                        <a:srgbClr val="15181D"/>
+                        <a:srgbClr val="4A4E55"/>
                       </a:solidFill>
                       <a:prstDash val="solid"/>
                       <a:round/>
@@ -14451,7 +14479,7 @@
                       <a:r>
                         <a:rPr lang="en-US" sz="1100" dirty="0">
                           <a:solidFill>
-                            <a:srgbClr val="15181D"/>
+                            <a:srgbClr val="E4E4E2"/>
                           </a:solidFill>
                           <a:latin typeface="Consolas" pitchFamily="34" charset="0"/>
                           <a:ea typeface="Consolas" pitchFamily="34" charset="-122"/>
@@ -14478,7 +14506,7 @@
                     </a:lnT>
                     <a:lnB w="9525" cap="flat" cmpd="sng" algn="ctr">
                       <a:solidFill>
-                        <a:srgbClr val="DADDE2"/>
+                        <a:srgbClr val="2A2D33"/>
                       </a:solidFill>
                       <a:prstDash val="solid"/>
                       <a:round/>
@@ -14498,7 +14526,7 @@
                       <a:r>
                         <a:rPr lang="en-US" sz="1100" dirty="0">
                           <a:solidFill>
-                            <a:srgbClr val="15181D"/>
+                            <a:srgbClr val="E4E4E2"/>
                           </a:solidFill>
                           <a:latin typeface="Consolas" pitchFamily="34" charset="0"/>
                           <a:ea typeface="Consolas" pitchFamily="34" charset="-122"/>
@@ -14525,7 +14553,7 @@
                     </a:lnT>
                     <a:lnB w="9525" cap="flat" cmpd="sng" algn="ctr">
                       <a:solidFill>
-                        <a:srgbClr val="DADDE2"/>
+                        <a:srgbClr val="2A2D33"/>
                       </a:solidFill>
                       <a:prstDash val="solid"/>
                       <a:round/>
@@ -14547,7 +14575,7 @@
                       <a:r>
                         <a:rPr lang="en-US" sz="1100" dirty="0">
                           <a:solidFill>
-                            <a:srgbClr val="15181D"/>
+                            <a:srgbClr val="E4E4E2"/>
                           </a:solidFill>
                           <a:latin typeface="Consolas" pitchFamily="34" charset="0"/>
                           <a:ea typeface="Consolas" pitchFamily="34" charset="-122"/>
@@ -14574,7 +14602,7 @@
                     </a:lnT>
                     <a:lnB w="9525" cap="flat" cmpd="sng" algn="ctr">
                       <a:solidFill>
-                        <a:srgbClr val="DADDE2"/>
+                        <a:srgbClr val="2A2D33"/>
                       </a:solidFill>
                       <a:prstDash val="solid"/>
                       <a:round/>
@@ -14594,7 +14622,7 @@
                       <a:r>
                         <a:rPr lang="en-US" sz="1100" dirty="0">
                           <a:solidFill>
-                            <a:srgbClr val="15181D"/>
+                            <a:srgbClr val="E4E4E2"/>
                           </a:solidFill>
                           <a:latin typeface="Consolas" pitchFamily="34" charset="0"/>
                           <a:ea typeface="Consolas" pitchFamily="34" charset="-122"/>
@@ -14621,7 +14649,7 @@
                     </a:lnT>
                     <a:lnB w="9525" cap="flat" cmpd="sng" algn="ctr">
                       <a:solidFill>
-                        <a:srgbClr val="DADDE2"/>
+                        <a:srgbClr val="2A2D33"/>
                       </a:solidFill>
                       <a:prstDash val="solid"/>
                       <a:round/>
@@ -14643,7 +14671,7 @@
                       <a:r>
                         <a:rPr lang="en-US" sz="1100" dirty="0">
                           <a:solidFill>
-                            <a:srgbClr val="15181D"/>
+                            <a:srgbClr val="E4E4E2"/>
                           </a:solidFill>
                           <a:latin typeface="Consolas" pitchFamily="34" charset="0"/>
                           <a:ea typeface="Consolas" pitchFamily="34" charset="-122"/>
@@ -14670,7 +14698,7 @@
                     </a:lnT>
                     <a:lnB w="9525" cap="flat" cmpd="sng" algn="ctr">
                       <a:solidFill>
-                        <a:srgbClr val="DADDE2"/>
+                        <a:srgbClr val="2A2D33"/>
                       </a:solidFill>
                       <a:prstDash val="solid"/>
                       <a:round/>
@@ -14690,7 +14718,7 @@
                       <a:r>
                         <a:rPr lang="en-US" sz="1100" dirty="0">
                           <a:solidFill>
-                            <a:srgbClr val="15181D"/>
+                            <a:srgbClr val="E4E4E2"/>
                           </a:solidFill>
                           <a:latin typeface="Consolas" pitchFamily="34" charset="0"/>
                           <a:ea typeface="Consolas" pitchFamily="34" charset="-122"/>
@@ -14717,7 +14745,7 @@
                     </a:lnT>
                     <a:lnB w="9525" cap="flat" cmpd="sng" algn="ctr">
                       <a:solidFill>
-                        <a:srgbClr val="DADDE2"/>
+                        <a:srgbClr val="2A2D33"/>
                       </a:solidFill>
                       <a:prstDash val="solid"/>
                       <a:round/>
@@ -14739,7 +14767,7 @@
                       <a:r>
                         <a:rPr lang="en-US" sz="1100" dirty="0">
                           <a:solidFill>
-                            <a:srgbClr val="15181D"/>
+                            <a:srgbClr val="E4E4E2"/>
                           </a:solidFill>
                           <a:latin typeface="Consolas" pitchFamily="34" charset="0"/>
                           <a:ea typeface="Consolas" pitchFamily="34" charset="-122"/>
@@ -14766,7 +14794,7 @@
                     </a:lnT>
                     <a:lnB w="9525" cap="flat" cmpd="sng" algn="ctr">
                       <a:solidFill>
-                        <a:srgbClr val="DADDE2"/>
+                        <a:srgbClr val="2A2D33"/>
                       </a:solidFill>
                       <a:prstDash val="solid"/>
                       <a:round/>
@@ -14786,7 +14814,7 @@
                       <a:r>
                         <a:rPr lang="en-US" sz="1100" dirty="0">
                           <a:solidFill>
-                            <a:srgbClr val="15181D"/>
+                            <a:srgbClr val="E4E4E2"/>
                           </a:solidFill>
                           <a:latin typeface="Consolas" pitchFamily="34" charset="0"/>
                           <a:ea typeface="Consolas" pitchFamily="34" charset="-122"/>
@@ -14813,7 +14841,7 @@
                     </a:lnT>
                     <a:lnB w="9525" cap="flat" cmpd="sng" algn="ctr">
                       <a:solidFill>
-                        <a:srgbClr val="DADDE2"/>
+                        <a:srgbClr val="2A2D33"/>
                       </a:solidFill>
                       <a:prstDash val="solid"/>
                       <a:round/>
@@ -14917,9 +14945,13 @@
             <a:avLst/>
           </a:prstGeom>
           <a:solidFill>
-            <a:schemeClr val="tx1"/>
+            <a:srgbClr val="1E2025"/>
           </a:solidFill>
-          <a:ln/>
+          <a:ln w="9525">
+            <a:solidFill>
+              <a:srgbClr val="2E3138"/>
+            </a:solidFill>
+          </a:ln>
         </p:spPr>
       </p:sp>
       <p:sp>
@@ -14952,7 +14984,7 @@
             <a:r>
               <a:rPr lang="en-US" sz="1050" dirty="0">
                 <a:solidFill>
-                  <a:srgbClr val="E4E7EC"/>
+                  <a:srgbClr val="E4E4E2"/>
                 </a:solidFill>
                 <a:latin typeface="Consolas" pitchFamily="34" charset="0"/>
                 <a:ea typeface="Consolas" pitchFamily="34" charset="-122"/>
@@ -14969,7 +15001,7 @@
             <a:r>
               <a:rPr lang="en-US" sz="1050" dirty="0">
                 <a:solidFill>
-                  <a:srgbClr val="F5B82E"/>
+                  <a:srgbClr val="F0B54A"/>
                 </a:solidFill>
                 <a:latin typeface="Consolas" pitchFamily="34" charset="0"/>
                 <a:ea typeface="Consolas" pitchFamily="34" charset="-122"/>
@@ -14989,7 +15021,7 @@
             <a:r>
               <a:rPr lang="en-US" sz="1050" dirty="0">
                 <a:solidFill>
-                  <a:srgbClr val="E4E7EC"/>
+                  <a:srgbClr val="E4E4E2"/>
                 </a:solidFill>
                 <a:latin typeface="Consolas" pitchFamily="34" charset="0"/>
                 <a:ea typeface="Consolas" pitchFamily="34" charset="-122"/>
@@ -15009,7 +15041,7 @@
             <a:r>
               <a:rPr lang="en-US" sz="1050" dirty="0">
                 <a:solidFill>
-                  <a:srgbClr val="E4E7EC"/>
+                  <a:srgbClr val="E4E4E2"/>
                 </a:solidFill>
                 <a:latin typeface="Consolas" pitchFamily="34" charset="0"/>
                 <a:ea typeface="Consolas" pitchFamily="34" charset="-122"/>
@@ -15026,7 +15058,7 @@
             <a:r>
               <a:rPr lang="en-US" sz="1050" dirty="0">
                 <a:solidFill>
-                  <a:srgbClr val="F5B82E"/>
+                  <a:srgbClr val="F0B54A"/>
                 </a:solidFill>
                 <a:latin typeface="Consolas" pitchFamily="34" charset="0"/>
                 <a:ea typeface="Consolas" pitchFamily="34" charset="-122"/>
@@ -15046,7 +15078,7 @@
             <a:r>
               <a:rPr lang="en-US" sz="1050" dirty="0">
                 <a:solidFill>
-                  <a:srgbClr val="E4E7EC"/>
+                  <a:srgbClr val="E4E4E2"/>
                 </a:solidFill>
                 <a:latin typeface="Consolas" pitchFamily="34" charset="0"/>
                 <a:ea typeface="Consolas" pitchFamily="34" charset="-122"/>
@@ -15066,7 +15098,7 @@
             <a:r>
               <a:rPr lang="en-US" sz="1050" dirty="0">
                 <a:solidFill>
-                  <a:srgbClr val="E4E7EC"/>
+                  <a:srgbClr val="E4E4E2"/>
                 </a:solidFill>
                 <a:latin typeface="Consolas" pitchFamily="34" charset="0"/>
                 <a:ea typeface="Consolas" pitchFamily="34" charset="-122"/>
@@ -15086,7 +15118,7 @@
             <a:r>
               <a:rPr lang="en-US" sz="1050" dirty="0">
                 <a:solidFill>
-                  <a:srgbClr val="E4E7EC"/>
+                  <a:srgbClr val="E4E4E2"/>
                 </a:solidFill>
                 <a:latin typeface="Consolas" pitchFamily="34" charset="0"/>
                 <a:ea typeface="Consolas" pitchFamily="34" charset="-122"/>
@@ -15106,7 +15138,7 @@
             <a:r>
               <a:rPr lang="en-US" sz="1050" dirty="0">
                 <a:solidFill>
-                  <a:srgbClr val="E4E7EC"/>
+                  <a:srgbClr val="E4E4E2"/>
                 </a:solidFill>
                 <a:latin typeface="Consolas" pitchFamily="34" charset="0"/>
                 <a:ea typeface="Consolas" pitchFamily="34" charset="-122"/>
@@ -15126,7 +15158,7 @@
             <a:r>
               <a:rPr lang="en-US" sz="1050" dirty="0">
                 <a:solidFill>
-                  <a:srgbClr val="E4E7EC"/>
+                  <a:srgbClr val="E4E4E2"/>
                 </a:solidFill>
                 <a:latin typeface="Consolas" pitchFamily="34" charset="0"/>
                 <a:ea typeface="Consolas" pitchFamily="34" charset="-122"/>
@@ -15146,7 +15178,7 @@
             <a:r>
               <a:rPr lang="en-US" sz="1050" dirty="0">
                 <a:solidFill>
-                  <a:srgbClr val="E4E7EC"/>
+                  <a:srgbClr val="E4E4E2"/>
                 </a:solidFill>
                 <a:latin typeface="Consolas" pitchFamily="34" charset="0"/>
                 <a:ea typeface="Consolas" pitchFamily="34" charset="-122"/>
@@ -15163,7 +15195,7 @@
             <a:r>
               <a:rPr lang="en-US" sz="1050" dirty="0">
                 <a:solidFill>
-                  <a:srgbClr val="F5B82E"/>
+                  <a:srgbClr val="F0B54A"/>
                 </a:solidFill>
                 <a:latin typeface="Consolas" pitchFamily="34" charset="0"/>
                 <a:ea typeface="Consolas" pitchFamily="34" charset="-122"/>
@@ -15183,7 +15215,7 @@
             <a:r>
               <a:rPr lang="en-US" sz="1050" dirty="0">
                 <a:solidFill>
-                  <a:srgbClr val="E4E7EC"/>
+                  <a:srgbClr val="E4E4E2"/>
                 </a:solidFill>
                 <a:latin typeface="Consolas" pitchFamily="34" charset="0"/>
                 <a:ea typeface="Consolas" pitchFamily="34" charset="-122"/>
@@ -15200,7 +15232,7 @@
             <a:r>
               <a:rPr lang="en-US" sz="1050" dirty="0">
                 <a:solidFill>
-                  <a:srgbClr val="F5B82E"/>
+                  <a:srgbClr val="F0B54A"/>
                 </a:solidFill>
                 <a:latin typeface="Consolas" pitchFamily="34" charset="0"/>
                 <a:ea typeface="Consolas" pitchFamily="34" charset="-122"/>
@@ -15242,7 +15274,7 @@
             <a:lvl1pPr>
               <a:defRPr sz="1000">
                 <a:solidFill>
-                  <a:srgbClr val="9AA1AC"/>
+                  <a:srgbClr val="868A91"/>
                 </a:solidFill>
                 <a:latin typeface="Consolas"/>
                 <a:ea typeface="Consolas"/>
@@ -15379,9 +15411,13 @@
             <a:avLst/>
           </a:prstGeom>
           <a:solidFill>
-            <a:schemeClr val="tx1"/>
+            <a:srgbClr val="1E2025"/>
           </a:solidFill>
-          <a:ln/>
+          <a:ln w="9525">
+            <a:solidFill>
+              <a:srgbClr val="2E3138"/>
+            </a:solidFill>
+          </a:ln>
         </p:spPr>
       </p:sp>
       <p:sp>
@@ -15414,7 +15450,7 @@
             <a:r>
               <a:rPr lang="en-US" sz="1100" dirty="0">
                 <a:solidFill>
-                  <a:srgbClr val="8B93A1"/>
+                  <a:srgbClr val="8A8E96"/>
                 </a:solidFill>
                 <a:latin typeface="Consolas" pitchFamily="34" charset="0"/>
                 <a:ea typeface="Consolas" pitchFamily="34" charset="-122"/>
@@ -15434,7 +15470,7 @@
             <a:r>
               <a:rPr lang="en-US" sz="1100" dirty="0">
                 <a:solidFill>
-                  <a:srgbClr val="E4E7EC"/>
+                  <a:srgbClr val="E4E4E2"/>
                 </a:solidFill>
                 <a:latin typeface="Consolas" pitchFamily="34" charset="0"/>
                 <a:ea typeface="Consolas" pitchFamily="34" charset="-122"/>
@@ -15454,7 +15490,7 @@
             <a:r>
               <a:rPr lang="en-US" sz="1100" dirty="0">
                 <a:solidFill>
-                  <a:srgbClr val="E4E7EC"/>
+                  <a:srgbClr val="E4E4E2"/>
                 </a:solidFill>
                 <a:latin typeface="Consolas" pitchFamily="34" charset="0"/>
                 <a:ea typeface="Consolas" pitchFamily="34" charset="-122"/>
@@ -15471,7 +15507,7 @@
             <a:r>
               <a:rPr lang="en-US" sz="1100" dirty="0">
                 <a:solidFill>
-                  <a:srgbClr val="F5B82E"/>
+                  <a:srgbClr val="F0B54A"/>
                 </a:solidFill>
                 <a:latin typeface="Consolas" pitchFamily="34" charset="0"/>
                 <a:ea typeface="Consolas" pitchFamily="34" charset="-122"/>
@@ -15488,7 +15524,7 @@
             <a:r>
               <a:rPr lang="en-US" sz="1100" dirty="0">
                 <a:solidFill>
-                  <a:srgbClr val="E4E7EC"/>
+                  <a:srgbClr val="E4E4E2"/>
                 </a:solidFill>
                 <a:latin typeface="Consolas" pitchFamily="34" charset="0"/>
                 <a:ea typeface="Consolas" pitchFamily="34" charset="-122"/>
@@ -15508,7 +15544,7 @@
             <a:r>
               <a:rPr lang="en-US" sz="1100" dirty="0">
                 <a:solidFill>
-                  <a:srgbClr val="E4E7EC"/>
+                  <a:srgbClr val="E4E4E2"/>
                 </a:solidFill>
                 <a:latin typeface="Consolas" pitchFamily="34" charset="0"/>
                 <a:ea typeface="Consolas" pitchFamily="34" charset="-122"/>
@@ -15528,7 +15564,7 @@
             <a:r>
               <a:rPr lang="en-US" sz="1100" dirty="0">
                 <a:solidFill>
-                  <a:srgbClr val="E4E7EC"/>
+                  <a:srgbClr val="E4E4E2"/>
                 </a:solidFill>
                 <a:latin typeface="Consolas" pitchFamily="34" charset="0"/>
                 <a:ea typeface="Consolas" pitchFamily="34" charset="-122"/>
@@ -15548,7 +15584,7 @@
             <a:r>
               <a:rPr lang="en-US" sz="1100" dirty="0">
                 <a:solidFill>
-                  <a:srgbClr val="E4E7EC"/>
+                  <a:srgbClr val="E4E4E2"/>
                 </a:solidFill>
                 <a:latin typeface="Consolas" pitchFamily="34" charset="0"/>
                 <a:ea typeface="Consolas" pitchFamily="34" charset="-122"/>
@@ -15568,7 +15604,7 @@
             <a:r>
               <a:rPr lang="en-US" sz="1100" dirty="0">
                 <a:solidFill>
-                  <a:srgbClr val="E4E7EC"/>
+                  <a:srgbClr val="E4E4E2"/>
                 </a:solidFill>
                 <a:latin typeface="Consolas" pitchFamily="34" charset="0"/>
                 <a:ea typeface="Consolas" pitchFamily="34" charset="-122"/>
@@ -15588,7 +15624,7 @@
             <a:r>
               <a:rPr lang="en-US" sz="1100" dirty="0">
                 <a:solidFill>
-                  <a:srgbClr val="E4E7EC"/>
+                  <a:srgbClr val="E4E4E2"/>
                 </a:solidFill>
                 <a:latin typeface="Consolas" pitchFamily="34" charset="0"/>
                 <a:ea typeface="Consolas" pitchFamily="34" charset="-122"/>
@@ -15608,7 +15644,7 @@
             <a:r>
               <a:rPr lang="en-US" sz="1100" dirty="0">
                 <a:solidFill>
-                  <a:srgbClr val="E4E7EC"/>
+                  <a:srgbClr val="E4E4E2"/>
                 </a:solidFill>
                 <a:latin typeface="Consolas" pitchFamily="34" charset="0"/>
                 <a:ea typeface="Consolas" pitchFamily="34" charset="-122"/>
@@ -15628,7 +15664,7 @@
             <a:r>
               <a:rPr lang="en-US" sz="1100" dirty="0">
                 <a:solidFill>
-                  <a:srgbClr val="E4E7EC"/>
+                  <a:srgbClr val="E4E4E2"/>
                 </a:solidFill>
                 <a:latin typeface="Consolas" pitchFamily="34" charset="0"/>
                 <a:ea typeface="Consolas" pitchFamily="34" charset="-122"/>
@@ -15648,7 +15684,7 @@
             <a:r>
               <a:rPr lang="en-US" sz="1100" dirty="0">
                 <a:solidFill>
-                  <a:srgbClr val="E4E7EC"/>
+                  <a:srgbClr val="E4E4E2"/>
                 </a:solidFill>
                 <a:latin typeface="Consolas" pitchFamily="34" charset="0"/>
                 <a:ea typeface="Consolas" pitchFamily="34" charset="-122"/>
@@ -15668,7 +15704,7 @@
             <a:r>
               <a:rPr lang="en-US" sz="1100" dirty="0">
                 <a:solidFill>
-                  <a:srgbClr val="8B93A1"/>
+                  <a:srgbClr val="8A8E96"/>
                 </a:solidFill>
                 <a:latin typeface="Consolas" pitchFamily="34" charset="0"/>
                 <a:ea typeface="Consolas" pitchFamily="34" charset="-122"/>
@@ -15998,7 +16034,7 @@
             <a:lvl1pPr>
               <a:defRPr sz="1000">
                 <a:solidFill>
-                  <a:srgbClr val="9AA1AC"/>
+                  <a:srgbClr val="868A91"/>
                 </a:solidFill>
                 <a:latin typeface="Consolas"/>
                 <a:ea typeface="Consolas"/>
@@ -16603,7 +16639,7 @@
                       <a:r>
                         <a:rPr lang="en-US" sz="1100" b="1" dirty="0">
                           <a:solidFill>
-                            <a:srgbClr val="4A5260"/>
+                            <a:srgbClr val="A9ACB2"/>
                           </a:solidFill>
                         </a:rPr>
                         <a:t>Value</a:t>
@@ -16623,7 +16659,7 @@
                     </a:lnT>
                     <a:lnB w="12700" cap="flat" cmpd="sng" algn="ctr">
                       <a:solidFill>
-                        <a:srgbClr val="15181D"/>
+                        <a:srgbClr val="4A4E55"/>
                       </a:solidFill>
                       <a:prstDash val="solid"/>
                       <a:round/>
@@ -16643,7 +16679,7 @@
                       <a:r>
                         <a:rPr lang="en-US" sz="1100" b="1" dirty="0">
                           <a:solidFill>
-                            <a:srgbClr val="4A5260"/>
+                            <a:srgbClr val="A9ACB2"/>
                           </a:solidFill>
                         </a:rPr>
                         <a:t>After step 1</a:t>
@@ -16663,7 +16699,7 @@
                     </a:lnT>
                     <a:lnB w="12700" cap="flat" cmpd="sng" algn="ctr">
                       <a:solidFill>
-                        <a:srgbClr val="15181D"/>
+                        <a:srgbClr val="4A4E55"/>
                       </a:solidFill>
                       <a:prstDash val="solid"/>
                       <a:round/>
@@ -16683,7 +16719,7 @@
                       <a:r>
                         <a:rPr lang="en-US" sz="1100" b="1" dirty="0">
                           <a:solidFill>
-                            <a:srgbClr val="4A5260"/>
+                            <a:srgbClr val="A9ACB2"/>
                           </a:solidFill>
                         </a:rPr>
                         <a:t>VLQ</a:t>
@@ -16703,7 +16739,7 @@
                     </a:lnT>
                     <a:lnB w="12700" cap="flat" cmpd="sng" algn="ctr">
                       <a:solidFill>
-                        <a:srgbClr val="15181D"/>
+                        <a:srgbClr val="4A4E55"/>
                       </a:solidFill>
                       <a:prstDash val="solid"/>
                       <a:round/>
@@ -16725,7 +16761,7 @@
                       <a:r>
                         <a:rPr lang="en-US" sz="1250" dirty="0">
                           <a:solidFill>
-                            <a:srgbClr val="15181D"/>
+                            <a:srgbClr val="E4E4E2"/>
                           </a:solidFill>
                         </a:rPr>
                         <a:t>0</a:t>
@@ -16745,7 +16781,7 @@
                     </a:lnT>
                     <a:lnB w="9525" cap="flat" cmpd="sng" algn="ctr">
                       <a:solidFill>
-                        <a:srgbClr val="DADDE2"/>
+                        <a:srgbClr val="2A2D33"/>
                       </a:solidFill>
                       <a:prstDash val="solid"/>
                       <a:round/>
@@ -16765,7 +16801,7 @@
                       <a:r>
                         <a:rPr lang="en-US" sz="1250" dirty="0">
                           <a:solidFill>
-                            <a:srgbClr val="15181D"/>
+                            <a:srgbClr val="E4E4E2"/>
                           </a:solidFill>
                         </a:rPr>
                         <a:t>0</a:t>
@@ -16785,7 +16821,7 @@
                     </a:lnT>
                     <a:lnB w="9525" cap="flat" cmpd="sng" algn="ctr">
                       <a:solidFill>
-                        <a:srgbClr val="DADDE2"/>
+                        <a:srgbClr val="2A2D33"/>
                       </a:solidFill>
                       <a:prstDash val="solid"/>
                       <a:round/>
@@ -16805,7 +16841,7 @@
                       <a:r>
                         <a:rPr lang="en-US" sz="1250" b="1" dirty="0">
                           <a:solidFill>
-                            <a:srgbClr val="15181D"/>
+                            <a:srgbClr val="E4E4E2"/>
                           </a:solidFill>
                           <a:latin typeface="Consolas" pitchFamily="34" charset="0"/>
                           <a:ea typeface="Consolas" pitchFamily="34" charset="-122"/>
@@ -16832,7 +16868,7 @@
                     </a:lnT>
                     <a:lnB w="9525" cap="flat" cmpd="sng" algn="ctr">
                       <a:solidFill>
-                        <a:srgbClr val="DADDE2"/>
+                        <a:srgbClr val="2A2D33"/>
                       </a:solidFill>
                       <a:prstDash val="solid"/>
                       <a:round/>
@@ -16854,7 +16890,7 @@
                       <a:r>
                         <a:rPr lang="en-US" sz="1250" dirty="0">
                           <a:solidFill>
-                            <a:srgbClr val="15181D"/>
+                            <a:srgbClr val="E4E4E2"/>
                           </a:solidFill>
                         </a:rPr>
                         <a:t>1</a:t>
@@ -16874,7 +16910,7 @@
                     </a:lnT>
                     <a:lnB w="9525" cap="flat" cmpd="sng" algn="ctr">
                       <a:solidFill>
-                        <a:srgbClr val="DADDE2"/>
+                        <a:srgbClr val="2A2D33"/>
                       </a:solidFill>
                       <a:prstDash val="solid"/>
                       <a:round/>
@@ -16894,7 +16930,7 @@
                       <a:r>
                         <a:rPr lang="en-US" sz="1250" dirty="0">
                           <a:solidFill>
-                            <a:srgbClr val="15181D"/>
+                            <a:srgbClr val="E4E4E2"/>
                           </a:solidFill>
                         </a:rPr>
                         <a:t>2</a:t>
@@ -16914,7 +16950,7 @@
                     </a:lnT>
                     <a:lnB w="9525" cap="flat" cmpd="sng" algn="ctr">
                       <a:solidFill>
-                        <a:srgbClr val="DADDE2"/>
+                        <a:srgbClr val="2A2D33"/>
                       </a:solidFill>
                       <a:prstDash val="solid"/>
                       <a:round/>
@@ -16934,7 +16970,7 @@
                       <a:r>
                         <a:rPr lang="en-US" sz="1250" b="1" dirty="0">
                           <a:solidFill>
-                            <a:srgbClr val="15181D"/>
+                            <a:srgbClr val="E4E4E2"/>
                           </a:solidFill>
                           <a:latin typeface="Consolas" pitchFamily="34" charset="0"/>
                           <a:ea typeface="Consolas" pitchFamily="34" charset="-122"/>
@@ -16961,7 +16997,7 @@
                     </a:lnT>
                     <a:lnB w="9525" cap="flat" cmpd="sng" algn="ctr">
                       <a:solidFill>
-                        <a:srgbClr val="DADDE2"/>
+                        <a:srgbClr val="2A2D33"/>
                       </a:solidFill>
                       <a:prstDash val="solid"/>
                       <a:round/>
@@ -16983,7 +17019,7 @@
                       <a:r>
                         <a:rPr lang="en-US" sz="1250" dirty="0">
                           <a:solidFill>
-                            <a:srgbClr val="15181D"/>
+                            <a:srgbClr val="E4E4E2"/>
                           </a:solidFill>
                         </a:rPr>
                         <a:t>−1</a:t>
@@ -17003,7 +17039,7 @@
                     </a:lnT>
                     <a:lnB w="9525" cap="flat" cmpd="sng" algn="ctr">
                       <a:solidFill>
-                        <a:srgbClr val="DADDE2"/>
+                        <a:srgbClr val="2A2D33"/>
                       </a:solidFill>
                       <a:prstDash val="solid"/>
                       <a:round/>
@@ -17023,7 +17059,7 @@
                       <a:r>
                         <a:rPr lang="en-US" sz="1250" dirty="0">
                           <a:solidFill>
-                            <a:srgbClr val="15181D"/>
+                            <a:srgbClr val="E4E4E2"/>
                           </a:solidFill>
                         </a:rPr>
                         <a:t>3</a:t>
@@ -17043,7 +17079,7 @@
                     </a:lnT>
                     <a:lnB w="9525" cap="flat" cmpd="sng" algn="ctr">
                       <a:solidFill>
-                        <a:srgbClr val="DADDE2"/>
+                        <a:srgbClr val="2A2D33"/>
                       </a:solidFill>
                       <a:prstDash val="solid"/>
                       <a:round/>
@@ -17063,7 +17099,7 @@
                       <a:r>
                         <a:rPr lang="en-US" sz="1250" b="1" dirty="0">
                           <a:solidFill>
-                            <a:srgbClr val="15181D"/>
+                            <a:srgbClr val="E4E4E2"/>
                           </a:solidFill>
                           <a:latin typeface="Consolas" pitchFamily="34" charset="0"/>
                           <a:ea typeface="Consolas" pitchFamily="34" charset="-122"/>
@@ -17090,7 +17126,7 @@
                     </a:lnT>
                     <a:lnB w="9525" cap="flat" cmpd="sng" algn="ctr">
                       <a:solidFill>
-                        <a:srgbClr val="DADDE2"/>
+                        <a:srgbClr val="2A2D33"/>
                       </a:solidFill>
                       <a:prstDash val="solid"/>
                       <a:round/>
@@ -17112,7 +17148,7 @@
                       <a:r>
                         <a:rPr lang="en-US" sz="1250" dirty="0">
                           <a:solidFill>
-                            <a:srgbClr val="15181D"/>
+                            <a:srgbClr val="E4E4E2"/>
                           </a:solidFill>
                         </a:rPr>
                         <a:t>15</a:t>
@@ -17132,7 +17168,7 @@
                     </a:lnT>
                     <a:lnB w="9525" cap="flat" cmpd="sng" algn="ctr">
                       <a:solidFill>
-                        <a:srgbClr val="DADDE2"/>
+                        <a:srgbClr val="2A2D33"/>
                       </a:solidFill>
                       <a:prstDash val="solid"/>
                       <a:round/>
@@ -17152,7 +17188,7 @@
                       <a:r>
                         <a:rPr lang="en-US" sz="1250" dirty="0">
                           <a:solidFill>
-                            <a:srgbClr val="15181D"/>
+                            <a:srgbClr val="E4E4E2"/>
                           </a:solidFill>
                         </a:rPr>
                         <a:t>30</a:t>
@@ -17172,7 +17208,7 @@
                     </a:lnT>
                     <a:lnB w="9525" cap="flat" cmpd="sng" algn="ctr">
                       <a:solidFill>
-                        <a:srgbClr val="DADDE2"/>
+                        <a:srgbClr val="2A2D33"/>
                       </a:solidFill>
                       <a:prstDash val="solid"/>
                       <a:round/>
@@ -17192,7 +17228,7 @@
                       <a:r>
                         <a:rPr lang="en-US" sz="1250" b="1" dirty="0">
                           <a:solidFill>
-                            <a:srgbClr val="15181D"/>
+                            <a:srgbClr val="E4E4E2"/>
                           </a:solidFill>
                           <a:latin typeface="Consolas" pitchFamily="34" charset="0"/>
                           <a:ea typeface="Consolas" pitchFamily="34" charset="-122"/>
@@ -17219,7 +17255,7 @@
                     </a:lnT>
                     <a:lnB w="9525" cap="flat" cmpd="sng" algn="ctr">
                       <a:solidFill>
-                        <a:srgbClr val="DADDE2"/>
+                        <a:srgbClr val="2A2D33"/>
                       </a:solidFill>
                       <a:prstDash val="solid"/>
                       <a:round/>
@@ -17241,7 +17277,7 @@
                       <a:r>
                         <a:rPr lang="en-US" sz="1250" dirty="0">
                           <a:solidFill>
-                            <a:srgbClr val="15181D"/>
+                            <a:srgbClr val="E4E4E2"/>
                           </a:solidFill>
                         </a:rPr>
                         <a:t>16</a:t>
@@ -17261,7 +17297,7 @@
                     </a:lnT>
                     <a:lnB w="9525" cap="flat" cmpd="sng" algn="ctr">
                       <a:solidFill>
-                        <a:srgbClr val="DADDE2"/>
+                        <a:srgbClr val="2A2D33"/>
                       </a:solidFill>
                       <a:prstDash val="solid"/>
                       <a:round/>
@@ -17281,7 +17317,7 @@
                       <a:r>
                         <a:rPr lang="en-US" sz="1250" dirty="0">
                           <a:solidFill>
-                            <a:srgbClr val="15181D"/>
+                            <a:srgbClr val="E4E4E2"/>
                           </a:solidFill>
                         </a:rPr>
                         <a:t>32 → 0+32, 1</a:t>
@@ -17301,7 +17337,7 @@
                     </a:lnT>
                     <a:lnB w="9525" cap="flat" cmpd="sng" algn="ctr">
                       <a:solidFill>
-                        <a:srgbClr val="DADDE2"/>
+                        <a:srgbClr val="2A2D33"/>
                       </a:solidFill>
                       <a:prstDash val="solid"/>
                       <a:round/>
@@ -17321,7 +17357,7 @@
                       <a:r>
                         <a:rPr lang="en-US" sz="1250" b="1" dirty="0">
                           <a:solidFill>
-                            <a:srgbClr val="15181D"/>
+                            <a:srgbClr val="E4E4E2"/>
                           </a:solidFill>
                           <a:latin typeface="Consolas" pitchFamily="34" charset="0"/>
                           <a:ea typeface="Consolas" pitchFamily="34" charset="-122"/>
@@ -17348,7 +17384,7 @@
                     </a:lnT>
                     <a:lnB w="9525" cap="flat" cmpd="sng" algn="ctr">
                       <a:solidFill>
-                        <a:srgbClr val="DADDE2"/>
+                        <a:srgbClr val="2A2D33"/>
                       </a:solidFill>
                       <a:prstDash val="solid"/>
                       <a:round/>
@@ -17370,7 +17406,7 @@
                       <a:r>
                         <a:rPr lang="en-US" sz="1250" dirty="0">
                           <a:solidFill>
-                            <a:srgbClr val="15181D"/>
+                            <a:srgbClr val="E4E4E2"/>
                           </a:solidFill>
                         </a:rPr>
                         <a:t>−5</a:t>
@@ -17390,7 +17426,7 @@
                     </a:lnT>
                     <a:lnB w="9525" cap="flat" cmpd="sng" algn="ctr">
                       <a:solidFill>
-                        <a:srgbClr val="DADDE2"/>
+                        <a:srgbClr val="2A2D33"/>
                       </a:solidFill>
                       <a:prstDash val="solid"/>
                       <a:round/>
@@ -17410,7 +17446,7 @@
                       <a:r>
                         <a:rPr lang="en-US" sz="1250" dirty="0">
                           <a:solidFill>
-                            <a:srgbClr val="15181D"/>
+                            <a:srgbClr val="E4E4E2"/>
                           </a:solidFill>
                         </a:rPr>
                         <a:t>11</a:t>
@@ -17430,7 +17466,7 @@
                     </a:lnT>
                     <a:lnB w="9525" cap="flat" cmpd="sng" algn="ctr">
                       <a:solidFill>
-                        <a:srgbClr val="DADDE2"/>
+                        <a:srgbClr val="2A2D33"/>
                       </a:solidFill>
                       <a:prstDash val="solid"/>
                       <a:round/>
@@ -17450,7 +17486,7 @@
                       <a:r>
                         <a:rPr lang="en-US" sz="1250" b="1" dirty="0">
                           <a:solidFill>
-                            <a:srgbClr val="15181D"/>
+                            <a:srgbClr val="E4E4E2"/>
                           </a:solidFill>
                           <a:latin typeface="Consolas" pitchFamily="34" charset="0"/>
                           <a:ea typeface="Consolas" pitchFamily="34" charset="-122"/>
@@ -17477,7 +17513,7 @@
                     </a:lnT>
                     <a:lnB w="9525" cap="flat" cmpd="sng" algn="ctr">
                       <a:solidFill>
-                        <a:srgbClr val="DADDE2"/>
+                        <a:srgbClr val="2A2D33"/>
                       </a:solidFill>
                       <a:prstDash val="solid"/>
                       <a:round/>
@@ -17557,7 +17593,7 @@
             <a:lvl1pPr>
               <a:defRPr sz="1000">
                 <a:solidFill>
-                  <a:srgbClr val="9AA1AC"/>
+                  <a:srgbClr val="868A91"/>
                 </a:solidFill>
                 <a:latin typeface="Consolas"/>
                 <a:ea typeface="Consolas"/>
@@ -17588,40 +17624,40 @@
   <a:themeElements>
     <a:clrScheme name="Tether Spans">
       <a:dk1>
-        <a:srgbClr val="15181D"/>
+        <a:srgbClr val="E4E4E2"/>
       </a:dk1>
       <a:lt1>
-        <a:srgbClr val="FFFFFF"/>
+        <a:srgbClr val="0F1012"/>
       </a:lt1>
       <a:dk2>
-        <a:srgbClr val="4A5260"/>
+        <a:srgbClr val="A9ACB2"/>
       </a:dk2>
       <a:lt2>
-        <a:srgbClr val="F3F4F6"/>
+        <a:srgbClr val="18191D"/>
       </a:lt2>
       <a:accent1>
-        <a:srgbClr val="F5B82E"/>
+        <a:srgbClr val="F0B54A"/>
       </a:accent1>
       <a:accent2>
-        <a:srgbClr val="1F4E79"/>
+        <a:srgbClr val="8AB4F8"/>
       </a:accent2>
       <a:accent3>
-        <a:srgbClr val="1F7A4D"/>
+        <a:srgbClr val="5CC98A"/>
       </a:accent3>
       <a:accent4>
-        <a:srgbClr val="B83227"/>
+        <a:srgbClr val="FF6F6B"/>
       </a:accent4>
       <a:accent5>
-        <a:srgbClr val="9AA1AC"/>
+        <a:srgbClr val="868A91"/>
       </a:accent5>
       <a:accent6>
-        <a:srgbClr val="5B4B8A"/>
+        <a:srgbClr val="C6A8F2"/>
       </a:accent6>
       <a:hlink>
-        <a:srgbClr val="1F4E79"/>
+        <a:srgbClr val="8AB4F8"/>
       </a:hlink>
       <a:folHlink>
-        <a:srgbClr val="5B4B8A"/>
+        <a:srgbClr val="C6A8F2"/>
       </a:folHlink>
     </a:clrScheme>
     <a:fontScheme name="Tether Spans">

--- a/docs/Tether-Review2-Presentation.pptx
+++ b/docs/Tether-Review2-Presentation.pptx
@@ -1705,7 +1705,7 @@
           <a:p>
             <a:r>
               <a:rPr lang="en-US" dirty="0"/>
-              <a:t>The playground now shows all six phases live. Under JavaScript, each underlined segment is one source-map entry: hovering it highlights the Tether code it came from. The Run tab executes the generated program. In the screenshot I am hovering var$ in the JavaScript: the Tether name var lights up, and the status bar shows both positions, 1-based in Tether and 0-based in the map.</a:t>
+              <a:t>The playground now shows all six phases live. Under JavaScript, each underlined segment is one source-map entry: hovering it highlights the Tether code it came from and draws a line, the tether, back to it. In the screenshot I am hovering var$ in the JavaScript: the line runs to the Tether name var, and the status bar shows both positions, 1-based in Tether and 0-based in the map. The Run tab executes the generated program in a worker, and a runtime error names the .tth line it came from.</a:t>
             </a:r>
             <a:endParaRPr lang="en-US" dirty="0"/>
           </a:p>
@@ -7283,7 +7283,7 @@
                   <a:schemeClr val="tx2"/>
                 </a:solidFill>
               </a:rPr>
-              <a:t>var$ lights up var; the status bar shows both positions</a:t>
+              <a:t>a line ties var$ back to var; the status bar shows both positions</a:t>
             </a:r>
             <a:endParaRPr lang="en-US" sz="1250" dirty="0"/>
           </a:p>
@@ -7355,7 +7355,7 @@
                   <a:schemeClr val="tx2"/>
                 </a:solidFill>
               </a:rPr>
-              <a:t>executes the generated program in a worker</a:t>
+              <a:t>executes it in a worker; a runtime error names the .tth line</a:t>
             </a:r>
             <a:endParaRPr lang="en-US" sz="1250" dirty="0"/>
           </a:p>
